--- a/assets/Engoo_Weekly Report_FR.pptx
+++ b/assets/Engoo_Weekly Report_FR.pptx
@@ -5,12 +5,12 @@
     <p:sldMasterId id="2147483672" r:id="rId1"/>
   </p:sldMasterIdLst>
   <p:sldIdLst>
-    <p:sldId id="284" r:id="rId2"/>
-    <p:sldId id="311" r:id="rId3"/>
-    <p:sldId id="309" r:id="rId4"/>
-    <p:sldId id="312" r:id="rId5"/>
-    <p:sldId id="302" r:id="rId6"/>
-    <p:sldId id="313" r:id="rId7"/>
+    <p:sldId id="316" r:id="rId2"/>
+    <p:sldId id="317" r:id="rId3"/>
+    <p:sldId id="325" r:id="rId4"/>
+    <p:sldId id="323" r:id="rId5"/>
+    <p:sldId id="324" r:id="rId6"/>
+    <p:sldId id="320" r:id="rId7"/>
     <p:sldId id="315" r:id="rId8"/>
   </p:sldIdLst>
   <p:sldSz cx="12192000" cy="6858000"/>
@@ -141,7 +141,7 @@
               <c:strCache>
                 <c:ptCount val="1"/>
                 <c:pt idx="0">
-                  <c:v>Views</c:v>
+                  <c:v>Vues</c:v>
                 </c:pt>
               </c:strCache>
             </c:strRef>
@@ -180,46 +180,46 @@
               <c:strCache>
                 <c:ptCount val="14"/>
                 <c:pt idx="0">
-                  <c:v>Mon 27 / 20</c:v>
+                  <c:v>Lun 27 / 20</c:v>
                 </c:pt>
                 <c:pt idx="1">
-                  <c:v>Tue 28 / 21</c:v>
+                  <c:v>Mar 28 / 21</c:v>
                 </c:pt>
                 <c:pt idx="2">
-                  <c:v>Wed 29 / 22</c:v>
+                  <c:v>Mer 29 / 22</c:v>
                 </c:pt>
                 <c:pt idx="3">
-                  <c:v>Thu 30 / 23</c:v>
+                  <c:v>Jeu 30 / 23</c:v>
                 </c:pt>
                 <c:pt idx="4">
-                  <c:v>Fri 31 / 24</c:v>
+                  <c:v>Ven 31 / 24</c:v>
                 </c:pt>
                 <c:pt idx="5">
-                  <c:v>Sat 1 / 25</c:v>
+                  <c:v>Sam 1 / 25</c:v>
                 </c:pt>
                 <c:pt idx="6">
-                  <c:v>Sun 2 / 26</c:v>
+                  <c:v>Dim 2 / 26</c:v>
                 </c:pt>
                 <c:pt idx="7">
-                  <c:v>Mon 20</c:v>
+                  <c:v>Lun 20</c:v>
                 </c:pt>
                 <c:pt idx="8">
-                  <c:v>Tue 21</c:v>
+                  <c:v>Mar 21</c:v>
                 </c:pt>
                 <c:pt idx="9">
-                  <c:v>Wed 22</c:v>
+                  <c:v>Mer 22</c:v>
                 </c:pt>
                 <c:pt idx="10">
-                  <c:v>Thu 23</c:v>
+                  <c:v>Jeu 23</c:v>
                 </c:pt>
                 <c:pt idx="11">
-                  <c:v>Fri 24</c:v>
+                  <c:v>Ven 24</c:v>
                 </c:pt>
                 <c:pt idx="12">
-                  <c:v>Sat 25</c:v>
+                  <c:v>Sam 25</c:v>
                 </c:pt>
                 <c:pt idx="13">
-                  <c:v>Sun 26</c:v>
+                  <c:v>Dim 26</c:v>
                 </c:pt>
               </c:strCache>
             </c:strRef>
@@ -273,7 +273,7 @@
           <c:idx val="1"/>
           <c:order val="2"/>
           <c:tx>
-            <c:v>Views_Previous Week</c:v>
+            <c:v>Vues (semaine précédente)</c:v>
           </c:tx>
           <c:spPr>
             <a:solidFill>
@@ -388,7 +388,7 @@
               <c:strCache>
                 <c:ptCount val="1"/>
                 <c:pt idx="0">
-                  <c:v>Engagement Rate</c:v>
+                  <c:v>Taux d'engagement</c:v>
                 </c:pt>
               </c:strCache>
             </c:strRef>
@@ -569,25 +569,25 @@
               <c:strCache>
                 <c:ptCount val="7"/>
                 <c:pt idx="0">
-                  <c:v>Mon 27 / 20</c:v>
+                  <c:v>Lun 27 / 20</c:v>
                 </c:pt>
                 <c:pt idx="1">
-                  <c:v>Tue 28 / 21</c:v>
+                  <c:v>Mar 28 / 21</c:v>
                 </c:pt>
                 <c:pt idx="2">
-                  <c:v>Wed 29 / 22</c:v>
+                  <c:v>Mer 29 / 22</c:v>
                 </c:pt>
                 <c:pt idx="3">
-                  <c:v>Thu 30 / 23</c:v>
+                  <c:v>Jeu 30 / 23</c:v>
                 </c:pt>
                 <c:pt idx="4">
-                  <c:v>Fri 31 / 24</c:v>
+                  <c:v>Ven 31 / 24</c:v>
                 </c:pt>
                 <c:pt idx="5">
-                  <c:v>Sat 1 / 25</c:v>
+                  <c:v>Sam 1 / 25</c:v>
                 </c:pt>
                 <c:pt idx="6">
-                  <c:v>Sun 2 / 26</c:v>
+                  <c:v>Dim 2 / 26</c:v>
                 </c:pt>
               </c:strCache>
             </c:strRef>
@@ -633,7 +633,7 @@
           <c:idx val="2"/>
           <c:order val="3"/>
           <c:tx>
-            <c:v>Engagement Rate_Previous Week</c:v>
+            <c:v>Taux d'engagement (semaine précédente)</c:v>
           </c:tx>
           <c:spPr>
             <a:ln>
@@ -1032,7 +1032,7 @@
           <a:p>
             <a:fld id="{FACCC3E1-D6CF-40B7-B817-18D62C8A9621}" type="datetimeFigureOut">
               <a:rPr lang="zh-TW" altLang="en-US" smtClean="0"/>
-              <a:t>2026/6/8</a:t>
+              <a:t>2026/10/23</a:t>
             </a:fld>
             <a:endParaRPr lang="zh-TW" altLang="en-US"/>
           </a:p>
@@ -1232,7 +1232,7 @@
           <a:p>
             <a:fld id="{FACCC3E1-D6CF-40B7-B817-18D62C8A9621}" type="datetimeFigureOut">
               <a:rPr lang="zh-TW" altLang="en-US" smtClean="0"/>
-              <a:t>2026/6/8</a:t>
+              <a:t>2026/10/23</a:t>
             </a:fld>
             <a:endParaRPr lang="zh-TW" altLang="en-US"/>
           </a:p>
@@ -1442,7 +1442,7 @@
           <a:p>
             <a:fld id="{FACCC3E1-D6CF-40B7-B817-18D62C8A9621}" type="datetimeFigureOut">
               <a:rPr lang="zh-TW" altLang="en-US" smtClean="0"/>
-              <a:t>2026/6/8</a:t>
+              <a:t>2026/10/23</a:t>
             </a:fld>
             <a:endParaRPr lang="zh-TW" altLang="en-US"/>
           </a:p>
@@ -1729,7 +1729,7 @@
           <a:p>
             <a:fld id="{FACCC3E1-D6CF-40B7-B817-18D62C8A9621}" type="datetimeFigureOut">
               <a:rPr lang="zh-TW" altLang="en-US" smtClean="0"/>
-              <a:t>2026/6/8</a:t>
+              <a:t>2026/10/23</a:t>
             </a:fld>
             <a:endParaRPr lang="zh-TW" altLang="en-US"/>
           </a:p>
@@ -2005,7 +2005,7 @@
           <a:p>
             <a:fld id="{FACCC3E1-D6CF-40B7-B817-18D62C8A9621}" type="datetimeFigureOut">
               <a:rPr lang="zh-TW" altLang="en-US" smtClean="0"/>
-              <a:t>2026/6/8</a:t>
+              <a:t>2026/10/23</a:t>
             </a:fld>
             <a:endParaRPr lang="zh-TW" altLang="en-US"/>
           </a:p>
@@ -2273,7 +2273,7 @@
           <a:p>
             <a:fld id="{FACCC3E1-D6CF-40B7-B817-18D62C8A9621}" type="datetimeFigureOut">
               <a:rPr lang="zh-TW" altLang="en-US" smtClean="0"/>
-              <a:t>2026/6/8</a:t>
+              <a:t>2026/10/23</a:t>
             </a:fld>
             <a:endParaRPr lang="zh-TW" altLang="en-US"/>
           </a:p>
@@ -2688,7 +2688,7 @@
           <a:p>
             <a:fld id="{FACCC3E1-D6CF-40B7-B817-18D62C8A9621}" type="datetimeFigureOut">
               <a:rPr lang="zh-TW" altLang="en-US" smtClean="0"/>
-              <a:t>2026/6/8</a:t>
+              <a:t>2026/10/23</a:t>
             </a:fld>
             <a:endParaRPr lang="zh-TW" altLang="en-US"/>
           </a:p>
@@ -2917,7 +2917,7 @@
           <a:p>
             <a:fld id="{FACCC3E1-D6CF-40B7-B817-18D62C8A9621}" type="datetimeFigureOut">
               <a:rPr lang="zh-TW" altLang="en-US" smtClean="0"/>
-              <a:t>2026/6/8</a:t>
+              <a:t>2026/10/23</a:t>
             </a:fld>
             <a:endParaRPr lang="zh-TW" altLang="en-US"/>
           </a:p>
@@ -3030,7 +3030,7 @@
           <a:p>
             <a:fld id="{FACCC3E1-D6CF-40B7-B817-18D62C8A9621}" type="datetimeFigureOut">
               <a:rPr lang="zh-TW" altLang="en-US" smtClean="0"/>
-              <a:t>2026/6/8</a:t>
+              <a:t>2026/10/23</a:t>
             </a:fld>
             <a:endParaRPr lang="zh-TW" altLang="en-US"/>
           </a:p>
@@ -3343,7 +3343,7 @@
           <a:p>
             <a:fld id="{FACCC3E1-D6CF-40B7-B817-18D62C8A9621}" type="datetimeFigureOut">
               <a:rPr lang="zh-TW" altLang="en-US" smtClean="0"/>
-              <a:t>2026/6/8</a:t>
+              <a:t>2026/10/23</a:t>
             </a:fld>
             <a:endParaRPr lang="zh-TW" altLang="en-US"/>
           </a:p>
@@ -3632,7 +3632,7 @@
           <a:p>
             <a:fld id="{FACCC3E1-D6CF-40B7-B817-18D62C8A9621}" type="datetimeFigureOut">
               <a:rPr lang="zh-TW" altLang="en-US" smtClean="0"/>
-              <a:t>2026/6/8</a:t>
+              <a:t>2026/10/23</a:t>
             </a:fld>
             <a:endParaRPr lang="zh-TW" altLang="en-US"/>
           </a:p>
@@ -3878,7 +3878,7 @@
           <a:p>
             <a:fld id="{FACCC3E1-D6CF-40B7-B817-18D62C8A9621}" type="datetimeFigureOut">
               <a:rPr lang="zh-TW" altLang="en-US" smtClean="0"/>
-              <a:t>2026/6/8</a:t>
+              <a:t>2026/10/23</a:t>
             </a:fld>
             <a:endParaRPr lang="zh-TW" altLang="en-US"/>
           </a:p>
@@ -4607,7 +4607,7 @@
                   <a:srgbClr val="F4C430"/>
                 </a:solidFill>
               </a:rPr>
-              <a:t>ENGOO · XIAOHONGSHU  |  WEEKLY SOCIAL PERFORMANCE</a:t>
+              <a:t>ENGOO · XIAOHONGSHU  |  PERFORMANCE SOCIALE HEBDOMADAIRE</a:t>
             </a:r>
           </a:p>
         </p:txBody>
@@ -4645,7 +4645,7 @@
                   <a:srgbClr val="FFE9A8"/>
                 </a:solidFill>
               </a:rPr>
-              <a:t>Reporting week: Jan 27 – Feb 2, 2025</a:t>
+              <a:t>Semaine du rapport : 27 janv. – 2 févr. 2025</a:t>
             </a:r>
           </a:p>
           <a:p>
@@ -4656,7 +4656,7 @@
                   <a:srgbClr val="FBE3E5"/>
                 </a:solidFill>
               </a:rPr>
-              <a:t>Chinese New Year campaign drives the strongest week of the quarter</a:t>
+              <a:t>La campagne du Nouvel An chinois signe la meilleure semaine depuis le début du suivi</a:t>
             </a:r>
           </a:p>
         </p:txBody>
@@ -4744,7 +4744,7 @@
         </p:blipFill>
         <p:spPr>
           <a:xfrm rot="2605941">
-            <a:off x="4164695" y="573774"/>
+            <a:off x="4164695" y="656904"/>
             <a:ext cx="3731978" cy="3618865"/>
           </a:xfrm>
           <a:custGeom>
@@ -4854,7 +4854,7 @@
         </p:spPr>
         <p:txBody>
           <a:bodyPr vert="horz" lIns="91440" tIns="45720" rIns="91440" bIns="45720" rtlCol="0" anchor="b">
-            <a:normAutofit/>
+            <a:normAutofit fontScale="85000" lnSpcReduction="10000"/>
           </a:bodyPr>
           <a:lstStyle>
             <a:lvl1pPr algn="ctr" defTabSz="914400" rtl="0" eaLnBrk="1" latinLnBrk="0" hangingPunct="1">
@@ -4882,7 +4882,7 @@
                   <a:srgbClr val="FFFFFF"/>
                 </a:solidFill>
               </a:rPr>
-              <a:t>Year of the Snake Lift-Off</a:t>
+              <a:t>L'année du Serpent prend son envol</a:t>
             </a:r>
           </a:p>
         </p:txBody>
@@ -4916,7 +4916,7 @@
         </p:blipFill>
         <p:spPr>
           <a:xfrm rot="2605941">
-            <a:off x="4106431" y="1044709"/>
+            <a:off x="4106431" y="1144465"/>
             <a:ext cx="3748038" cy="3748038"/>
           </a:xfrm>
           <a:custGeom>
@@ -5046,7 +5046,7 @@
     </p:spTree>
     <p:extLst>
       <p:ext uri="{BB962C8B-B14F-4D97-AF65-F5344CB8AC3E}">
-        <p14:creationId xmlns:p14="http://schemas.microsoft.com/office/powerpoint/2010/main" val="717031567"/>
+        <p14:creationId xmlns:p14="http://schemas.microsoft.com/office/powerpoint/2010/main" val="3710770317"/>
       </p:ext>
     </p:extLst>
   </p:cSld>
@@ -5100,7 +5100,7 @@
                   <a:srgbClr val="FFFFFF"/>
                 </a:solidFill>
               </a:rPr>
-              <a:t>Executive Summary</a:t>
+              <a:t>Synthèse</a:t>
             </a:r>
           </a:p>
         </p:txBody>
@@ -5270,7 +5270,7 @@
                 <a:latin typeface="Poppins"/>
                 <a:cs typeface="Poppins"/>
               </a:rPr>
-              <a:t>Best week of the quarter</a:t>
+              <a:t>Meilleure semaine depuis le début du suivi</a:t>
             </a:r>
           </a:p>
         </p:txBody>
@@ -5312,7 +5312,7 @@
                 <a:latin typeface="Poppins"/>
                 <a:cs typeface="Poppins"/>
               </a:rPr>
-              <a:t>3,063 views  ·  +50% WoW</a:t>
+              <a:t>3 063 vues  ·  +50 % vs S-1</a:t>
             </a:r>
           </a:p>
         </p:txBody>
@@ -5482,7 +5482,7 @@
                 <a:latin typeface="Poppins"/>
                 <a:cs typeface="Poppins"/>
               </a:rPr>
-              <a:t>Followers more than doubled</a:t>
+              <a:t>Les nouveaux abonnés ont plus que doublé</a:t>
             </a:r>
           </a:p>
         </p:txBody>
@@ -5524,7 +5524,7 @@
                 <a:latin typeface="Poppins"/>
                 <a:cs typeface="Poppins"/>
               </a:rPr>
-              <a:t>+47 new followers  ·  +147% WoW</a:t>
+              <a:t>+47 nouveaux abonnés  ·  +147 % vs S-1</a:t>
             </a:r>
           </a:p>
         </p:txBody>
@@ -5694,7 +5694,7 @@
                 <a:latin typeface="Poppins"/>
                 <a:cs typeface="Poppins"/>
               </a:rPr>
-              <a:t>Engagement rate hit 5.5%</a:t>
+              <a:t>Taux d'engagement à 5,5 %</a:t>
             </a:r>
           </a:p>
         </p:txBody>
@@ -5736,7 +5736,7 @@
                 <a:latin typeface="Poppins"/>
                 <a:cs typeface="Poppins"/>
               </a:rPr>
-              <a:t>Saves +67%  ·  Comments +75%</a:t>
+              <a:t>Enregistrements +67 %  ·  Commentaires +75 %</a:t>
             </a:r>
           </a:p>
         </p:txBody>
@@ -5906,7 +5906,7 @@
                 <a:latin typeface="Poppins"/>
                 <a:cs typeface="Poppins"/>
               </a:rPr>
-              <a:t>Reach hit a quarterly high</a:t>
+              <a:t>Visites du profil en hausse</a:t>
             </a:r>
           </a:p>
         </p:txBody>
@@ -5948,7 +5948,7 @@
                 <a:latin typeface="Poppins"/>
                 <a:cs typeface="Poppins"/>
               </a:rPr>
-              <a:t>Top posts cleared 3,000+ views each</a:t>
+              <a:t>175 visites du profil  ·  +36 % vs S-1</a:t>
             </a:r>
           </a:p>
         </p:txBody>
@@ -6111,7 +6111,7 @@
                 <a:latin typeface="Poppins"/>
                 <a:cs typeface="Poppins"/>
               </a:rPr>
-              <a:t>Takeaway</a:t>
+              <a:t>À retenir</a:t>
             </a:r>
           </a:p>
         </p:txBody>
@@ -6151,7 +6151,7 @@
                   <a:srgbClr val="3A3A44"/>
                 </a:solidFill>
               </a:rPr>
-              <a:t>Momentum is real — watch the post-holiday dip.</a:t>
+              <a:t>La dynamique est réelle : surveiller la baisse post-fêtes.</a:t>
             </a:r>
           </a:p>
         </p:txBody>
@@ -6159,7 +6159,7 @@
     </p:spTree>
     <p:extLst>
       <p:ext uri="{BB962C8B-B14F-4D97-AF65-F5344CB8AC3E}">
-        <p14:creationId xmlns:p14="http://schemas.microsoft.com/office/powerpoint/2010/main" val="4030576522"/>
+        <p14:creationId xmlns:p14="http://schemas.microsoft.com/office/powerpoint/2010/main" val="3587613002"/>
       </p:ext>
     </p:extLst>
   </p:cSld>
@@ -6218,7 +6218,7 @@
                   <a:srgbClr val="FFFFFF"/>
                 </a:solidFill>
               </a:rPr>
-              <a:t>KPI Scorecard</a:t>
+              <a:t>Tableau de bord des KPI</a:t>
             </a:r>
           </a:p>
         </p:txBody>
@@ -6294,7 +6294,7 @@
         <p:spPr>
           <a:xfrm>
             <a:off x="876300" y="2026920"/>
-            <a:ext cx="2971800" cy="355600"/>
+            <a:ext cx="2971800" cy="338554"/>
           </a:xfrm>
           <a:prstGeom prst="rect">
             <a:avLst/>
@@ -6317,7 +6317,7 @@
                 <a:ea typeface="Calibri"/>
                 <a:cs typeface="Calibri"/>
               </a:rPr>
-              <a:t>Views</a:t>
+              <a:t>Vues</a:t>
             </a:r>
             <a:endParaRPr lang="zh-TW" altLang="en-US" sz="1600" b="1">
               <a:solidFill>
@@ -6366,7 +6366,7 @@
                 <a:latin typeface="Poppins"/>
                 <a:cs typeface="Poppins"/>
               </a:rPr>
-              <a:t>3,063</a:t>
+              <a:t>3 063</a:t>
             </a:r>
             <a:endParaRPr lang="zh-TW" altLang="en-US" sz="2800" b="1">
               <a:solidFill>
@@ -6436,21 +6436,8 @@
                   <a:srgbClr val="196B24"/>
                 </a:solidFill>
               </a:rPr>
-              <a:t>▲ </a:t>
-            </a:r>
-            <a:r>
-              <a:rPr lang="en-US" altLang="zh-TW" sz="1400" b="1" dirty="0">
-                <a:solidFill>
-                  <a:srgbClr val="196B24"/>
-                </a:solidFill>
-              </a:rPr>
-              <a:t>+50%</a:t>
-            </a:r>
-            <a:endParaRPr lang="zh-TW" altLang="en-US" sz="1400" b="1" dirty="0">
-              <a:solidFill>
-                <a:srgbClr val="196B24"/>
-              </a:solidFill>
-            </a:endParaRPr>
+              <a:t>▲ +50 %</a:t>
+            </a:r>
           </a:p>
         </p:txBody>
       </p:sp>
@@ -6525,7 +6512,7 @@
         <p:spPr>
           <a:xfrm>
             <a:off x="4610100" y="2026920"/>
-            <a:ext cx="2971800" cy="355600"/>
+            <a:ext cx="2971800" cy="338554"/>
           </a:xfrm>
           <a:prstGeom prst="rect">
             <a:avLst/>
@@ -6548,7 +6535,7 @@
                 <a:ea typeface="Calibri"/>
                 <a:cs typeface="Calibri"/>
               </a:rPr>
-              <a:t>New Followers</a:t>
+              <a:t>Nouveaux abonnés</a:t>
             </a:r>
             <a:endParaRPr lang="zh-TW" altLang="en-US" sz="1600" b="1">
               <a:solidFill>
@@ -6667,21 +6654,8 @@
                   <a:srgbClr val="196B24"/>
                 </a:solidFill>
               </a:rPr>
-              <a:t>▲ </a:t>
-            </a:r>
-            <a:r>
-              <a:rPr lang="en-US" altLang="zh-TW" sz="1400" b="1">
-                <a:solidFill>
-                  <a:srgbClr val="196B24"/>
-                </a:solidFill>
-              </a:rPr>
-              <a:t>+147%</a:t>
-            </a:r>
-            <a:endParaRPr lang="zh-TW" altLang="en-US" sz="1400" b="1">
-              <a:solidFill>
-                <a:srgbClr val="196B24"/>
-              </a:solidFill>
-            </a:endParaRPr>
+              <a:t>▲ +147 %</a:t>
+            </a:r>
           </a:p>
         </p:txBody>
       </p:sp>
@@ -6756,7 +6730,7 @@
         <p:spPr>
           <a:xfrm>
             <a:off x="8343900" y="2026920"/>
-            <a:ext cx="2971800" cy="355600"/>
+            <a:ext cx="2971800" cy="338554"/>
           </a:xfrm>
           <a:prstGeom prst="rect">
             <a:avLst/>
@@ -6779,7 +6753,7 @@
                 <a:ea typeface="Calibri"/>
                 <a:cs typeface="Calibri"/>
               </a:rPr>
-              <a:t>Engagement Rate</a:t>
+              <a:t>Taux d'engagement</a:t>
             </a:r>
             <a:endParaRPr lang="zh-TW" altLang="en-US" sz="1600" b="1">
               <a:solidFill>
@@ -6828,7 +6802,7 @@
                 <a:latin typeface="Poppins"/>
                 <a:cs typeface="Poppins"/>
               </a:rPr>
-              <a:t>5.5%</a:t>
+              <a:t>5,5 %</a:t>
             </a:r>
             <a:endParaRPr lang="zh-TW" altLang="en-US" sz="2800" b="1">
               <a:solidFill>
@@ -6898,7 +6872,7 @@
                   <a:srgbClr val="196B24"/>
                 </a:solidFill>
               </a:rPr>
-              <a:t>▲ +0.4pp</a:t>
+              <a:t>▲ +0,4 pt</a:t>
             </a:r>
             <a:endParaRPr lang="zh-TW" altLang="en-US" sz="1400" b="1">
               <a:solidFill>
@@ -6979,7 +6953,7 @@
         <p:spPr>
           <a:xfrm>
             <a:off x="876300" y="3261360"/>
-            <a:ext cx="2971800" cy="355600"/>
+            <a:ext cx="2971800" cy="338554"/>
           </a:xfrm>
           <a:prstGeom prst="rect">
             <a:avLst/>
@@ -7002,7 +6976,7 @@
                 <a:ea typeface="Calibri"/>
                 <a:cs typeface="Calibri"/>
               </a:rPr>
-              <a:t>Saves</a:t>
+              <a:t>Enregistrements</a:t>
             </a:r>
             <a:endParaRPr lang="zh-TW" altLang="en-US" sz="1600" b="1">
               <a:solidFill>
@@ -7121,21 +7095,8 @@
                   <a:srgbClr val="196B24"/>
                 </a:solidFill>
               </a:rPr>
-              <a:t>▲ </a:t>
-            </a:r>
-            <a:r>
-              <a:rPr lang="en-US" altLang="zh-TW" sz="1400" b="1">
-                <a:solidFill>
-                  <a:srgbClr val="196B24"/>
-                </a:solidFill>
-              </a:rPr>
-              <a:t>+67%</a:t>
-            </a:r>
-            <a:endParaRPr lang="zh-TW" altLang="en-US" sz="1400" b="1">
-              <a:solidFill>
-                <a:srgbClr val="196B24"/>
-              </a:solidFill>
-            </a:endParaRPr>
+              <a:t>▲ +67 %</a:t>
+            </a:r>
           </a:p>
         </p:txBody>
       </p:sp>
@@ -7210,7 +7171,7 @@
         <p:spPr>
           <a:xfrm>
             <a:off x="4610100" y="3261360"/>
-            <a:ext cx="2971800" cy="355600"/>
+            <a:ext cx="2971800" cy="338554"/>
           </a:xfrm>
           <a:prstGeom prst="rect">
             <a:avLst/>
@@ -7233,7 +7194,7 @@
                 <a:ea typeface="Calibri"/>
                 <a:cs typeface="Calibri"/>
               </a:rPr>
-              <a:t>Comments</a:t>
+              <a:t>Commentaires</a:t>
             </a:r>
             <a:endParaRPr lang="zh-TW" altLang="en-US" sz="1600" b="1">
               <a:solidFill>
@@ -7352,21 +7313,8 @@
                   <a:srgbClr val="196B24"/>
                 </a:solidFill>
               </a:rPr>
-              <a:t>▲ </a:t>
-            </a:r>
-            <a:r>
-              <a:rPr lang="en-US" altLang="zh-TW" sz="1400" b="1" dirty="0">
-                <a:solidFill>
-                  <a:srgbClr val="196B24"/>
-                </a:solidFill>
-              </a:rPr>
-              <a:t>+75%</a:t>
-            </a:r>
-            <a:endParaRPr lang="zh-TW" altLang="en-US" sz="1400" b="1" dirty="0">
-              <a:solidFill>
-                <a:srgbClr val="196B24"/>
-              </a:solidFill>
-            </a:endParaRPr>
+              <a:t>▲ +75 %</a:t>
+            </a:r>
           </a:p>
         </p:txBody>
       </p:sp>
@@ -7441,7 +7389,7 @@
         <p:spPr>
           <a:xfrm>
             <a:off x="8343900" y="3261360"/>
-            <a:ext cx="2971800" cy="355600"/>
+            <a:ext cx="2971800" cy="338554"/>
           </a:xfrm>
           <a:prstGeom prst="rect">
             <a:avLst/>
@@ -7464,7 +7412,7 @@
                 <a:ea typeface="Calibri"/>
                 <a:cs typeface="Calibri"/>
               </a:rPr>
-              <a:t>Watch Time</a:t>
+              <a:t>Temps de visionnage</a:t>
             </a:r>
             <a:endParaRPr lang="zh-TW" altLang="en-US" sz="1600" b="1">
               <a:solidFill>
@@ -7513,17 +7461,7 @@
                 <a:latin typeface="Poppins"/>
                 <a:cs typeface="Poppins"/>
               </a:rPr>
-              <a:t>22 </a:t>
-            </a:r>
-            <a:r>
-              <a:rPr lang="fr-FR" altLang="zh-TW" sz="2800" b="1" dirty="0" err="1">
-                <a:solidFill>
-                  <a:srgbClr val="1A1A2E"/>
-                </a:solidFill>
-                <a:latin typeface="Poppins"/>
-                <a:cs typeface="Poppins"/>
-              </a:rPr>
-              <a:t>hrs</a:t>
+              <a:t>22 h</a:t>
             </a:r>
             <a:endParaRPr lang="zh-TW" altLang="en-US" sz="2800" b="1" dirty="0">
               <a:solidFill>
@@ -7593,21 +7531,8 @@
                   <a:srgbClr val="196B24"/>
                 </a:solidFill>
               </a:rPr>
-              <a:t>▲ </a:t>
-            </a:r>
-            <a:r>
-              <a:rPr lang="en-US" altLang="zh-TW" sz="1400" b="1">
-                <a:solidFill>
-                  <a:srgbClr val="196B24"/>
-                </a:solidFill>
-              </a:rPr>
-              <a:t>+46%</a:t>
-            </a:r>
-            <a:endParaRPr lang="zh-TW" altLang="en-US" sz="1400" b="1">
-              <a:solidFill>
-                <a:srgbClr val="196B24"/>
-              </a:solidFill>
-            </a:endParaRPr>
+              <a:t>▲ +46 %</a:t>
+            </a:r>
           </a:p>
         </p:txBody>
       </p:sp>
@@ -7646,23 +7571,7 @@
                   <a:srgbClr val="6B7280"/>
                 </a:solidFill>
               </a:rPr>
-              <a:t>Week of Jan 27 – </a:t>
-            </a:r>
-            <a:r>
-              <a:rPr lang="fr-FR" altLang="zh-TW" sz="1400" i="1" dirty="0" err="1">
-                <a:solidFill>
-                  <a:srgbClr val="6B7280"/>
-                </a:solidFill>
-              </a:rPr>
-              <a:t>Feb</a:t>
-            </a:r>
-            <a:r>
-              <a:rPr lang="fr-FR" altLang="zh-TW" sz="1400" i="1" dirty="0">
-                <a:solidFill>
-                  <a:srgbClr val="6B7280"/>
-                </a:solidFill>
-              </a:rPr>
-              <a:t> 2, 2025 vs Jan 20 – 26, 2025</a:t>
+              <a:t>Semaine du 27 janv. au 2 févr. 2025 vs semaine du 20 au 26 janv. 2025</a:t>
             </a:r>
             <a:endParaRPr lang="zh-TW" altLang="en-US" sz="1400" i="1" dirty="0">
               <a:solidFill>
@@ -8000,13 +7909,7 @@
         <p:nvGraphicFramePr>
           <p:cNvPr id="201" name="Daily Trend Chart"/>
           <p:cNvGraphicFramePr/>
-          <p:nvPr>
-            <p:extLst>
-              <p:ext uri="{D42A27DB-BD31-4B8C-83A1-F6EECF244321}">
-                <p14:modId xmlns:p14="http://schemas.microsoft.com/office/powerpoint/2010/main" val="3313983"/>
-              </p:ext>
-            </p:extLst>
-          </p:nvPr>
+          <p:nvPr/>
         </p:nvGraphicFramePr>
         <p:xfrm>
           <a:off x="762000" y="4222100"/>
@@ -8021,7 +7924,7 @@
     </p:spTree>
     <p:extLst>
       <p:ext uri="{BB962C8B-B14F-4D97-AF65-F5344CB8AC3E}">
-        <p14:creationId xmlns:p14="http://schemas.microsoft.com/office/powerpoint/2010/main" val="2405416296"/>
+        <p14:creationId xmlns:p14="http://schemas.microsoft.com/office/powerpoint/2010/main" val="829620980"/>
       </p:ext>
     </p:extLst>
   </p:cSld>
@@ -8075,7 +7978,7 @@
                   <a:srgbClr val="FFFFFF"/>
                 </a:solidFill>
               </a:rPr>
-              <a:t>Top Content</a:t>
+              <a:t>Aperçu des contenus</a:t>
             </a:r>
           </a:p>
         </p:txBody>
@@ -8261,27 +8164,7 @@
                 <a:latin typeface="Poppins"/>
                 <a:cs typeface="Poppins"/>
               </a:rPr>
-              <a:t>Lunar New </a:t>
-            </a:r>
-            <a:r>
-              <a:rPr lang="fr-FR" altLang="zh-TW" sz="1600" b="1" dirty="0" err="1">
-                <a:solidFill>
-                  <a:srgbClr val="1A1A2E"/>
-                </a:solidFill>
-                <a:latin typeface="Poppins"/>
-                <a:cs typeface="Poppins"/>
-              </a:rPr>
-              <a:t>Year</a:t>
-            </a:r>
-            <a:r>
-              <a:rPr lang="fr-FR" altLang="zh-TW" sz="1600" b="1" dirty="0">
-                <a:solidFill>
-                  <a:srgbClr val="1A1A2E"/>
-                </a:solidFill>
-                <a:latin typeface="Poppins"/>
-                <a:cs typeface="Poppins"/>
-              </a:rPr>
-              <a:t> Zodiac</a:t>
+              <a:t>Zodiaque du Nouvel An</a:t>
             </a:r>
             <a:endParaRPr lang="zh-TW" altLang="en-US" sz="1600" b="1" dirty="0">
               <a:solidFill>
@@ -8308,7 +8191,7 @@
         <p:spPr>
           <a:xfrm>
             <a:off x="952390" y="5692874"/>
-            <a:ext cx="2387600" cy="523220"/>
+            <a:ext cx="2387600" cy="738664"/>
           </a:xfrm>
           <a:prstGeom prst="rect">
             <a:avLst/>
@@ -8328,7 +8211,7 @@
                   <a:srgbClr val="2B2D42"/>
                 </a:solidFill>
               </a:rPr>
-              <a:t>Fortune rankings + lucky colors · #1 for saves</a:t>
+              <a:t>Classements de chance + couleurs porte-bonheur</a:t>
             </a:r>
           </a:p>
         </p:txBody>
@@ -8402,7 +8285,7 @@
         <p:spPr>
           <a:xfrm>
             <a:off x="4807668" y="5315226"/>
-            <a:ext cx="2387600" cy="660400"/>
+            <a:ext cx="2387600" cy="338554"/>
           </a:xfrm>
           <a:prstGeom prst="rect">
             <a:avLst/>
@@ -8424,7 +8307,7 @@
                 <a:latin typeface="Poppins"/>
                 <a:cs typeface="Poppins"/>
               </a:rPr>
-              <a:t>Bilingual News</a:t>
+              <a:t>Actualités bilingues</a:t>
             </a:r>
             <a:endParaRPr lang="zh-TW" altLang="en-US" sz="1600" b="1">
               <a:solidFill>
@@ -8451,7 +8334,7 @@
         <p:spPr>
           <a:xfrm>
             <a:off x="4807668" y="5692874"/>
-            <a:ext cx="2387600" cy="523220"/>
+            <a:ext cx="2387600" cy="738664"/>
           </a:xfrm>
           <a:prstGeom prst="rect">
             <a:avLst/>
@@ -8471,7 +8354,7 @@
                   <a:srgbClr val="2B2D42"/>
                 </a:solidFill>
               </a:rPr>
-              <a:t>Daily news that doubles as study material</a:t>
+              <a:t>Actualités quotidiennes qui servent aussi de support d'étude</a:t>
             </a:r>
           </a:p>
         </p:txBody>
@@ -8567,7 +8450,7 @@
                 <a:latin typeface="Poppins"/>
                 <a:cs typeface="Poppins"/>
               </a:rPr>
-              <a:t>Festival Word Games</a:t>
+              <a:t>Jeux de mots festifs</a:t>
             </a:r>
             <a:endParaRPr lang="zh-TW" altLang="en-US" sz="1600" b="1" dirty="0">
               <a:solidFill>
@@ -8668,7 +8551,7 @@
                   <a:srgbClr val="2B2D42"/>
                 </a:solidFill>
               </a:rPr>
-              <a:t>Bilingual riddles · most-commented post</a:t>
+              <a:t>Devinettes bilingues pour la Fête des lanternes</a:t>
             </a:r>
           </a:p>
         </p:txBody>
@@ -8729,10 +8612,10 @@
       </p:sp>
       <p:sp>
         <p:nvSpPr>
-          <p:cNvPr id="16" name="Rectangle : coins arrondis 15">
-            <a:extLst>
-              <a:ext uri="{FF2B5EF4-FFF2-40B4-BE49-F238E27FC236}">
-                <a16:creationId xmlns:a16="http://schemas.microsoft.com/office/drawing/2014/main" id="{D719B1D7-FA18-4D1F-95CD-00C4B727DE1D}"/>
+          <p:cNvPr id="19" name="Rectangle 18">
+            <a:extLst>
+              <a:ext uri="{FF2B5EF4-FFF2-40B4-BE49-F238E27FC236}">
+                <a16:creationId xmlns:a16="http://schemas.microsoft.com/office/drawing/2014/main" id="{D1AE3124-FAB4-4D03-9469-403C638DA1A3}"/>
               </a:ext>
             </a:extLst>
           </p:cNvPr>
@@ -8741,16 +8624,14 @@
         </p:nvSpPr>
         <p:spPr>
           <a:xfrm>
-            <a:off x="1582310" y="2064026"/>
-            <a:ext cx="1127760" cy="330200"/>
-          </a:xfrm>
-          <a:prstGeom prst="roundRect">
-            <a:avLst/>
-          </a:prstGeom>
-          <a:solidFill>
-            <a:srgbClr val="A50D24"/>
-          </a:solidFill>
-          <a:ln w="12700" cap="flat" cmpd="sng" algn="ctr">
+            <a:off x="8922249" y="1886226"/>
+            <a:ext cx="2489200" cy="3276600"/>
+          </a:xfrm>
+          <a:prstGeom prst="rect">
+            <a:avLst/>
+          </a:prstGeom>
+          <a:noFill/>
+          <a:ln w="38100" cap="flat" cmpd="sng" algn="ctr">
             <a:solidFill>
               <a:srgbClr val="F4C430"/>
             </a:solidFill>
@@ -8775,238 +8656,18 @@
           </a:fontRef>
         </p:style>
         <p:txBody>
-          <a:bodyPr vertOverflow="clip" horzOverflow="clip" wrap="none" rtlCol="0" anchor="ctr" anchorCtr="0">
-            <a:noAutofit/>
-          </a:bodyPr>
-          <a:lstStyle/>
-          <a:p>
-            <a:pPr algn="ctr"/>
-            <a:r>
-              <a:rPr lang="fr-FR" altLang="zh-TW" sz="1200" b="1" dirty="0">
-                <a:solidFill>
-                  <a:srgbClr val="FFE9A8"/>
-                </a:solidFill>
-                <a:latin typeface="Poppins"/>
-                <a:cs typeface="Poppins"/>
-              </a:rPr>
-              <a:t>TOP SAVES</a:t>
-            </a:r>
-            <a:endParaRPr lang="zh-TW" altLang="en-US" sz="1200" b="1" dirty="0">
-              <a:solidFill>
-                <a:srgbClr val="FFE9A8"/>
-              </a:solidFill>
-              <a:latin typeface="Poppins"/>
-              <a:cs typeface="Poppins"/>
-            </a:endParaRPr>
-          </a:p>
-        </p:txBody>
-      </p:sp>
-      <p:sp>
-        <p:nvSpPr>
-          <p:cNvPr id="19" name="Rectangle 18">
-            <a:extLst>
-              <a:ext uri="{FF2B5EF4-FFF2-40B4-BE49-F238E27FC236}">
-                <a16:creationId xmlns:a16="http://schemas.microsoft.com/office/drawing/2014/main" id="{D1AE3124-FAB4-4D03-9469-403C638DA1A3}"/>
-              </a:ext>
-            </a:extLst>
-          </p:cNvPr>
-          <p:cNvSpPr/>
-          <p:nvPr/>
-        </p:nvSpPr>
-        <p:spPr>
-          <a:xfrm>
-            <a:off x="8922249" y="1886226"/>
-            <a:ext cx="2489200" cy="3276600"/>
-          </a:xfrm>
-          <a:prstGeom prst="rect">
-            <a:avLst/>
-          </a:prstGeom>
-          <a:noFill/>
-          <a:ln w="38100" cap="flat" cmpd="sng" algn="ctr">
-            <a:solidFill>
-              <a:srgbClr val="F4C430"/>
-            </a:solidFill>
-            <a:prstDash val="solid"/>
-            <a:miter lim="800000"/>
-          </a:ln>
-        </p:spPr>
-        <p:style>
-          <a:lnRef idx="2">
-            <a:schemeClr val="accent1">
-              <a:shade val="15000"/>
-            </a:schemeClr>
-          </a:lnRef>
-          <a:fillRef idx="1">
-            <a:schemeClr val="accent1"/>
-          </a:fillRef>
-          <a:effectRef idx="0">
-            <a:schemeClr val="accent1"/>
-          </a:effectRef>
-          <a:fontRef idx="minor">
-            <a:schemeClr val="lt1"/>
-          </a:fontRef>
-        </p:style>
-        <p:txBody>
           <a:bodyPr vertOverflow="clip" horzOverflow="clip" rtlCol="0" anchor="t"/>
           <a:lstStyle/>
           <a:p>
             <a:pPr algn="l"/>
             <a:endParaRPr lang="zh-TW" altLang="en-US"/>
-          </a:p>
-        </p:txBody>
-      </p:sp>
-      <p:sp>
-        <p:nvSpPr>
-          <p:cNvPr id="18" name="Rectangle : coins arrondis 17">
-            <a:extLst>
-              <a:ext uri="{FF2B5EF4-FFF2-40B4-BE49-F238E27FC236}">
-                <a16:creationId xmlns:a16="http://schemas.microsoft.com/office/drawing/2014/main" id="{5CB36001-A052-4A38-85D8-123ADB6DEE20}"/>
-              </a:ext>
-            </a:extLst>
-          </p:cNvPr>
-          <p:cNvSpPr/>
-          <p:nvPr/>
-        </p:nvSpPr>
-        <p:spPr>
-          <a:xfrm>
-            <a:off x="5346148" y="2064026"/>
-            <a:ext cx="1310640" cy="330200"/>
-          </a:xfrm>
-          <a:prstGeom prst="roundRect">
-            <a:avLst/>
-          </a:prstGeom>
-          <a:solidFill>
-            <a:srgbClr val="A50D24"/>
-          </a:solidFill>
-          <a:ln w="12700" cap="flat" cmpd="sng" algn="ctr">
-            <a:solidFill>
-              <a:srgbClr val="F4C430"/>
-            </a:solidFill>
-            <a:prstDash val="solid"/>
-            <a:miter lim="800000"/>
-          </a:ln>
-        </p:spPr>
-        <p:style>
-          <a:lnRef idx="2">
-            <a:schemeClr val="accent1">
-              <a:shade val="15000"/>
-            </a:schemeClr>
-          </a:lnRef>
-          <a:fillRef idx="1">
-            <a:schemeClr val="accent1"/>
-          </a:fillRef>
-          <a:effectRef idx="0">
-            <a:schemeClr val="accent1"/>
-          </a:effectRef>
-          <a:fontRef idx="minor">
-            <a:schemeClr val="lt1"/>
-          </a:fontRef>
-        </p:style>
-        <p:txBody>
-          <a:bodyPr vertOverflow="clip" horzOverflow="clip" wrap="none" rtlCol="0" anchor="ctr" anchorCtr="0">
-            <a:noAutofit/>
-          </a:bodyPr>
-          <a:lstStyle/>
-          <a:p>
-            <a:pPr algn="ctr"/>
-            <a:r>
-              <a:rPr lang="fr-FR" altLang="zh-TW" sz="1200" b="1" dirty="0">
-                <a:solidFill>
-                  <a:srgbClr val="FFE9A8"/>
-                </a:solidFill>
-                <a:latin typeface="Poppins"/>
-                <a:cs typeface="Poppins"/>
-              </a:rPr>
-              <a:t>DAILY HABIT</a:t>
-            </a:r>
-            <a:endParaRPr lang="zh-TW" altLang="en-US" sz="1200" b="1" dirty="0">
-              <a:solidFill>
-                <a:srgbClr val="FFE9A8"/>
-              </a:solidFill>
-              <a:latin typeface="Poppins"/>
-              <a:cs typeface="Poppins"/>
-            </a:endParaRPr>
-          </a:p>
-        </p:txBody>
-      </p:sp>
-      <p:sp>
-        <p:nvSpPr>
-          <p:cNvPr id="20" name="Rectangle : coins arrondis 19">
-            <a:extLst>
-              <a:ext uri="{FF2B5EF4-FFF2-40B4-BE49-F238E27FC236}">
-                <a16:creationId xmlns:a16="http://schemas.microsoft.com/office/drawing/2014/main" id="{1D6299D5-375B-4EF6-88A9-A60A85428285}"/>
-              </a:ext>
-            </a:extLst>
-          </p:cNvPr>
-          <p:cNvSpPr/>
-          <p:nvPr/>
-        </p:nvSpPr>
-        <p:spPr>
-          <a:xfrm>
-            <a:off x="9420089" y="2064026"/>
-            <a:ext cx="1493520" cy="330200"/>
-          </a:xfrm>
-          <a:prstGeom prst="roundRect">
-            <a:avLst/>
-          </a:prstGeom>
-          <a:solidFill>
-            <a:srgbClr val="A50D24"/>
-          </a:solidFill>
-          <a:ln w="12700" cap="flat" cmpd="sng" algn="ctr">
-            <a:solidFill>
-              <a:srgbClr val="F4C430"/>
-            </a:solidFill>
-            <a:prstDash val="solid"/>
-            <a:miter lim="800000"/>
-          </a:ln>
-        </p:spPr>
-        <p:style>
-          <a:lnRef idx="2">
-            <a:schemeClr val="accent1">
-              <a:shade val="15000"/>
-            </a:schemeClr>
-          </a:lnRef>
-          <a:fillRef idx="1">
-            <a:schemeClr val="accent1"/>
-          </a:fillRef>
-          <a:effectRef idx="0">
-            <a:schemeClr val="accent1"/>
-          </a:effectRef>
-          <a:fontRef idx="minor">
-            <a:schemeClr val="lt1"/>
-          </a:fontRef>
-        </p:style>
-        <p:txBody>
-          <a:bodyPr vertOverflow="clip" horzOverflow="clip" wrap="none" rtlCol="0" anchor="ctr" anchorCtr="0">
-            <a:noAutofit/>
-          </a:bodyPr>
-          <a:lstStyle/>
-          <a:p>
-            <a:pPr algn="ctr"/>
-            <a:r>
-              <a:rPr lang="fr-FR" altLang="zh-TW" sz="1200" b="1" dirty="0">
-                <a:solidFill>
-                  <a:srgbClr val="FFE9A8"/>
-                </a:solidFill>
-                <a:latin typeface="Poppins"/>
-                <a:cs typeface="Poppins"/>
-              </a:rPr>
-              <a:t>MOST COMMENTS</a:t>
-            </a:r>
-            <a:endParaRPr lang="zh-TW" altLang="en-US" sz="1200" b="1" dirty="0">
-              <a:solidFill>
-                <a:srgbClr val="FFE9A8"/>
-              </a:solidFill>
-              <a:latin typeface="Poppins"/>
-              <a:cs typeface="Poppins"/>
-            </a:endParaRPr>
           </a:p>
         </p:txBody>
       </p:sp>
     </p:spTree>
     <p:extLst>
       <p:ext uri="{BB962C8B-B14F-4D97-AF65-F5344CB8AC3E}">
-        <p14:creationId xmlns:p14="http://schemas.microsoft.com/office/powerpoint/2010/main" val="1327481644"/>
+        <p14:creationId xmlns:p14="http://schemas.microsoft.com/office/powerpoint/2010/main" val="3382681002"/>
       </p:ext>
     </p:extLst>
   </p:cSld>
@@ -9060,7 +8721,7 @@
                   <a:srgbClr val="FFFFFF"/>
                 </a:solidFill>
               </a:rPr>
-              <a:t>What Drove the Week</a:t>
+              <a:t>Les moteurs de la semaine</a:t>
             </a:r>
           </a:p>
         </p:txBody>
@@ -9233,7 +8894,7 @@
                   <a:srgbClr val="196B24"/>
                 </a:solidFill>
               </a:rPr>
-              <a:t>WORKED</a:t>
+              <a:t>RÉUSSI</a:t>
             </a:r>
             <a:endParaRPr lang="zh-TW" altLang="en-US" sz="1200" b="1">
               <a:solidFill>
@@ -9258,7 +8919,7 @@
         <p:spPr>
           <a:xfrm>
             <a:off x="1143000" y="2082800"/>
-            <a:ext cx="3429000" cy="381000"/>
+            <a:ext cx="3429000" cy="646331"/>
           </a:xfrm>
           <a:prstGeom prst="rect">
             <a:avLst/>
@@ -9280,7 +8941,7 @@
                 <a:latin typeface="Poppins"/>
                 <a:cs typeface="Poppins"/>
               </a:rPr>
-              <a:t>Cultural timing won</a:t>
+              <a:t>Le calendrier culturel a payé</a:t>
             </a:r>
             <a:endParaRPr lang="zh-TW" altLang="en-US" b="1">
               <a:solidFill>
@@ -9306,8 +8967,8 @@
         </p:nvSpPr>
         <p:spPr>
           <a:xfrm>
-            <a:off x="1143000" y="2514600"/>
-            <a:ext cx="4521200" cy="523220"/>
+            <a:off x="1143000" y="2844800"/>
+            <a:ext cx="4521200" cy="738664"/>
           </a:xfrm>
           <a:prstGeom prst="rect">
             <a:avLst/>
@@ -9327,7 +8988,7 @@
                   <a:srgbClr val="2B2D42"/>
                 </a:solidFill>
               </a:rPr>
-              <a:t>Posting Zodiac and Lantern content on the actual CNY dates put us in front of a surging, intent-driven audience.</a:t>
+              <a:t>Publier le contenu Zodiaque aux dates exactes du Nouvel An chinois nous a placés face à une audience en forte hausse et motivée.</a:t>
             </a:r>
             <a:endParaRPr lang="zh-TW" altLang="en-US" sz="1400">
               <a:solidFill>
@@ -9505,7 +9166,7 @@
                   <a:srgbClr val="196B24"/>
                 </a:solidFill>
               </a:rPr>
-              <a:t>WORKED</a:t>
+              <a:t>RÉUSSI</a:t>
             </a:r>
             <a:endParaRPr lang="zh-TW" altLang="en-US" sz="1200" b="1">
               <a:solidFill>
@@ -9530,7 +9191,7 @@
         <p:spPr>
           <a:xfrm>
             <a:off x="6578600" y="2082800"/>
-            <a:ext cx="3429000" cy="381000"/>
+            <a:ext cx="3429000" cy="646331"/>
           </a:xfrm>
           <a:prstGeom prst="rect">
             <a:avLst/>
@@ -9552,7 +9213,7 @@
                 <a:latin typeface="Poppins"/>
                 <a:cs typeface="Poppins"/>
               </a:rPr>
-              <a:t>Saves outpaced likes</a:t>
+              <a:t>Plus d'enregistrements que de j'aime</a:t>
             </a:r>
             <a:endParaRPr lang="zh-TW" altLang="en-US" b="1">
               <a:solidFill>
@@ -9578,8 +9239,8 @@
         </p:nvSpPr>
         <p:spPr>
           <a:xfrm>
-            <a:off x="6578600" y="2514600"/>
-            <a:ext cx="4521200" cy="523220"/>
+            <a:off x="6578600" y="2844800"/>
+            <a:ext cx="4521200" cy="738664"/>
           </a:xfrm>
           <a:prstGeom prst="rect">
             <a:avLst/>
@@ -9599,7 +9260,7 @@
                   <a:srgbClr val="2B2D42"/>
                 </a:solidFill>
               </a:rPr>
-              <a:t>40 saves (+67%) means viewers bookmarked posts as study references — high-value, repeat-view behavior.</a:t>
+              <a:t>40 enregistrements (+67 %) : les utilisateurs gardent les posts comme supports d'étude et y reviennent, un comportement à forte valeur.</a:t>
             </a:r>
             <a:endParaRPr lang="zh-TW" altLang="en-US" sz="1400">
               <a:solidFill>
@@ -9777,7 +9438,7 @@
                   <a:srgbClr val="196B24"/>
                 </a:solidFill>
               </a:rPr>
-              <a:t>WORKED</a:t>
+              <a:t>RÉUSSI</a:t>
             </a:r>
             <a:endParaRPr lang="zh-TW" altLang="en-US" sz="1200" b="1">
               <a:solidFill>
@@ -9802,7 +9463,7 @@
         <p:spPr>
           <a:xfrm>
             <a:off x="1143000" y="4292600"/>
-            <a:ext cx="3429000" cy="381000"/>
+            <a:ext cx="3429000" cy="646331"/>
           </a:xfrm>
           <a:prstGeom prst="rect">
             <a:avLst/>
@@ -9824,7 +9485,7 @@
                 <a:latin typeface="Poppins"/>
                 <a:cs typeface="Poppins"/>
               </a:rPr>
-              <a:t>Followers compounded</a:t>
+              <a:t>Les abonnés ont fortement progressé</a:t>
             </a:r>
             <a:endParaRPr lang="zh-TW" altLang="en-US" b="1">
               <a:solidFill>
@@ -9850,7 +9511,7 @@
         </p:nvSpPr>
         <p:spPr>
           <a:xfrm>
-            <a:off x="1143000" y="4724400"/>
+            <a:off x="1143000" y="5054600"/>
             <a:ext cx="4521200" cy="523220"/>
           </a:xfrm>
           <a:prstGeom prst="rect">
@@ -9871,7 +9532,7 @@
                   <a:srgbClr val="2B2D42"/>
                 </a:solidFill>
               </a:rPr>
-              <a:t>+47 followers (+147%) on flat ad spend — the holiday series converted browsers into subscribers.</a:t>
+              <a:t>+47 nouveaux abonnés (+147 %) : la série des fêtes a converti les visiteurs en abonnés.</a:t>
             </a:r>
             <a:endParaRPr lang="zh-TW" altLang="en-US" sz="1400">
               <a:solidFill>
@@ -10049,7 +9710,7 @@
                   <a:srgbClr val="8A5A00"/>
                 </a:solidFill>
               </a:rPr>
-              <a:t>WATCH</a:t>
+              <a:t>À SURVEILLER</a:t>
             </a:r>
             <a:endParaRPr lang="zh-TW" altLang="en-US" sz="1200" b="1">
               <a:solidFill>
@@ -10074,7 +9735,7 @@
         <p:spPr>
           <a:xfrm>
             <a:off x="6578600" y="4292600"/>
-            <a:ext cx="3429000" cy="381000"/>
+            <a:ext cx="3429000" cy="646331"/>
           </a:xfrm>
           <a:prstGeom prst="rect">
             <a:avLst/>
@@ -10096,7 +9757,7 @@
                 <a:latin typeface="Poppins"/>
                 <a:cs typeface="Poppins"/>
               </a:rPr>
-              <a:t>Watch the post-holiday dip</a:t>
+              <a:t>Surveiller la baisse après les fêtes</a:t>
             </a:r>
             <a:endParaRPr lang="zh-TW" altLang="en-US" b="1">
               <a:solidFill>
@@ -10122,8 +9783,8 @@
         </p:nvSpPr>
         <p:spPr>
           <a:xfrm>
-            <a:off x="6578600" y="4724400"/>
-            <a:ext cx="4521200" cy="523220"/>
+            <a:off x="6578600" y="5054600"/>
+            <a:ext cx="4521200" cy="738664"/>
           </a:xfrm>
           <a:prstGeom prst="rect">
             <a:avLst/>
@@ -10143,7 +9804,7 @@
                   <a:srgbClr val="2B2D42"/>
                 </a:solidFill>
               </a:rPr>
-              <a:t>Sunday (Feb 2) views fell to 210 as the holiday wound down. Expect normalization next week without a new hook.</a:t>
+              <a:t>Dimanche 2 févr., les vues sont tombées à 210 avec la fin des fêtes. Retour à la normale attendu la semaine prochaine sans nouvelle accroche.</a:t>
             </a:r>
             <a:endParaRPr lang="zh-TW" altLang="en-US" sz="1400">
               <a:solidFill>
@@ -10156,7 +9817,7 @@
     </p:spTree>
     <p:extLst>
       <p:ext uri="{BB962C8B-B14F-4D97-AF65-F5344CB8AC3E}">
-        <p14:creationId xmlns:p14="http://schemas.microsoft.com/office/powerpoint/2010/main" val="2970656315"/>
+        <p14:creationId xmlns:p14="http://schemas.microsoft.com/office/powerpoint/2010/main" val="2629022506"/>
       </p:ext>
     </p:extLst>
   </p:cSld>
@@ -10210,7 +9871,7 @@
                   <a:srgbClr val="FFFFFF"/>
                 </a:solidFill>
               </a:rPr>
-              <a:t>Recommendations</a:t>
+              <a:t>Recommandations</a:t>
             </a:r>
           </a:p>
         </p:txBody>
@@ -10358,7 +10019,7 @@
         <p:spPr>
           <a:xfrm>
             <a:off x="1752600" y="2171700"/>
-            <a:ext cx="9474200" cy="304800"/>
+            <a:ext cx="9474200" cy="346249"/>
           </a:xfrm>
           <a:prstGeom prst="rect">
             <a:avLst/>
@@ -10380,7 +10041,7 @@
                 <a:latin typeface="Poppins"/>
                 <a:cs typeface="Poppins"/>
               </a:rPr>
-              <a:t>Build a cultural-calendar content engine</a:t>
+              <a:t>Planifier les contenus selon le calendrier culturel</a:t>
             </a:r>
             <a:endParaRPr lang="zh-TW" altLang="en-US" sz="1650" b="1">
               <a:solidFill>
@@ -10427,7 +10088,7 @@
                   <a:srgbClr val="3A3A44"/>
                 </a:solidFill>
               </a:rPr>
-              <a:t>Pre-produce bilingual posts for Lantern, Qingming, May Day</a:t>
+              <a:t>Préparer des posts bilingues pour la Fête des lanternes, Qingming et le 1er mai</a:t>
             </a:r>
           </a:p>
         </p:txBody>
@@ -10575,7 +10236,7 @@
         <p:spPr>
           <a:xfrm>
             <a:off x="1752600" y="3289300"/>
-            <a:ext cx="9474200" cy="304800"/>
+            <a:ext cx="9474200" cy="346249"/>
           </a:xfrm>
           <a:prstGeom prst="rect">
             <a:avLst/>
@@ -10597,7 +10258,7 @@
                 <a:latin typeface="Poppins"/>
                 <a:cs typeface="Poppins"/>
               </a:rPr>
-              <a:t>Lean into “save-worthy” formats</a:t>
+              <a:t>Miser sur les formats « à enregistrer »</a:t>
             </a:r>
             <a:endParaRPr lang="zh-TW" altLang="en-US" sz="1650" b="1">
               <a:solidFill>
@@ -10644,7 +10305,7 @@
                   <a:srgbClr val="3A3A44"/>
                 </a:solidFill>
               </a:rPr>
-              <a:t>One reference carousel per week — rankings, riddles, glossaries</a:t>
+              <a:t>Un carrousel de référence par semaine : classements, devinettes, glossaires</a:t>
             </a:r>
           </a:p>
         </p:txBody>
@@ -10792,7 +10453,7 @@
         <p:spPr>
           <a:xfrm>
             <a:off x="1752600" y="4406900"/>
-            <a:ext cx="9474200" cy="304800"/>
+            <a:ext cx="9474200" cy="346249"/>
           </a:xfrm>
           <a:prstGeom prst="rect">
             <a:avLst/>
@@ -10814,7 +10475,7 @@
                 <a:latin typeface="Poppins"/>
                 <a:cs typeface="Poppins"/>
               </a:rPr>
-              <a:t>Convert the follower spike</a:t>
+              <a:t>Convertir le pic d'abonnés</a:t>
             </a:r>
             <a:endParaRPr lang="zh-TW" altLang="en-US" sz="1650" b="1">
               <a:solidFill>
@@ -10861,7 +10522,7 @@
                   <a:srgbClr val="3A3A44"/>
                 </a:solidFill>
               </a:rPr>
-              <a:t>Pin a “start here” post + free-trial CTA while interest is warm</a:t>
+              <a:t>Épingler un post « commencez ici » + CTA d'essai gratuit tant que l'intérêt est fort</a:t>
             </a:r>
           </a:p>
         </p:txBody>
@@ -11009,7 +10670,7 @@
         <p:spPr>
           <a:xfrm>
             <a:off x="1752600" y="5524500"/>
-            <a:ext cx="9474200" cy="304800"/>
+            <a:ext cx="9474200" cy="346249"/>
           </a:xfrm>
           <a:prstGeom prst="rect">
             <a:avLst/>
@@ -11031,7 +10692,7 @@
                 <a:latin typeface="Poppins"/>
                 <a:cs typeface="Poppins"/>
               </a:rPr>
-              <a:t>Reply to every comment within 24h</a:t>
+              <a:t>Répondre à chaque commentaire sous 24 h</a:t>
             </a:r>
             <a:endParaRPr lang="zh-TW" altLang="en-US" sz="1650" b="1">
               <a:solidFill>
@@ -11078,7 +10739,7 @@
                   <a:srgbClr val="3A3A44"/>
                 </a:solidFill>
               </a:rPr>
-              <a:t>Comments +75% — sustained replies signal the algorithm</a:t>
+              <a:t>Commentaires +75 % : des réponses régulières envoient un signal à l'algorithme</a:t>
             </a:r>
           </a:p>
         </p:txBody>
@@ -11086,7 +10747,7 @@
     </p:spTree>
     <p:extLst>
       <p:ext uri="{BB962C8B-B14F-4D97-AF65-F5344CB8AC3E}">
-        <p14:creationId xmlns:p14="http://schemas.microsoft.com/office/powerpoint/2010/main" val="2741382773"/>
+        <p14:creationId xmlns:p14="http://schemas.microsoft.com/office/powerpoint/2010/main" val="2024313907"/>
       </p:ext>
     </p:extLst>
   </p:cSld>
@@ -11737,7 +11398,7 @@
                             <a:srgbClr val="3A3A44"/>
                           </a:solidFill>
                         </a:rPr>
-                        <a:t>Jeu</a:t>
+                        <a:t>Jeudi</a:t>
                       </a:r>
                     </a:p>
                   </a:txBody>
@@ -12208,7 +11869,7 @@
 
 <file path=ppt/webextensions/taskpanes.xml><?xml version="1.0" encoding="utf-8"?>
 <wetp:taskpanes xmlns:wetp="http://schemas.microsoft.com/office/webextensions/taskpanes/2010/11">
-  <wetp:taskpane dockstate="right" visibility="0" width="438" row="2">
+  <wetp:taskpane dockstate="right" visibility="0" width="438" row="0">
     <wetp:webextensionref xmlns:r="http://schemas.openxmlformats.org/officeDocument/2006/relationships" r:id="rId1"/>
   </wetp:taskpane>
 </wetp:taskpanes>

--- a/assets/Engoo_Weekly Report_FR.pptx
+++ b/assets/Engoo_Weekly Report_FR.pptx
@@ -5,13 +5,13 @@
     <p:sldMasterId id="2147483672" r:id="rId1"/>
   </p:sldMasterIdLst>
   <p:sldIdLst>
-    <p:sldId id="316" r:id="rId2"/>
-    <p:sldId id="317" r:id="rId3"/>
+    <p:sldId id="331" r:id="rId2"/>
+    <p:sldId id="327" r:id="rId3"/>
     <p:sldId id="325" r:id="rId4"/>
-    <p:sldId id="323" r:id="rId5"/>
-    <p:sldId id="324" r:id="rId6"/>
+    <p:sldId id="328" r:id="rId5"/>
+    <p:sldId id="329" r:id="rId6"/>
     <p:sldId id="320" r:id="rId7"/>
-    <p:sldId id="315" r:id="rId8"/>
+    <p:sldId id="330" r:id="rId8"/>
   </p:sldIdLst>
   <p:sldSz cx="12192000" cy="6858000"/>
   <p:notesSz cx="6858000" cy="9144000"/>
@@ -4635,7 +4635,9 @@
           </a:xfrm>
         </p:spPr>
         <p:txBody>
-          <a:bodyPr/>
+          <a:bodyPr>
+            <a:noAutofit/>
+          </a:bodyPr>
           <a:lstStyle/>
           <a:p>
             <a:pPr algn="ctr"/>
@@ -5046,7 +5048,7 @@
     </p:spTree>
     <p:extLst>
       <p:ext uri="{BB962C8B-B14F-4D97-AF65-F5344CB8AC3E}">
-        <p14:creationId xmlns:p14="http://schemas.microsoft.com/office/powerpoint/2010/main" val="3710770317"/>
+        <p14:creationId xmlns:p14="http://schemas.microsoft.com/office/powerpoint/2010/main" val="499005209"/>
       </p:ext>
     </p:extLst>
   </p:cSld>
@@ -5119,8 +5121,8 @@
         </p:nvSpPr>
         <p:spPr>
           <a:xfrm>
-            <a:off x="736600" y="1879600"/>
-            <a:ext cx="10718800" cy="863600"/>
+            <a:off x="762000" y="1879600"/>
+            <a:ext cx="10668000" cy="863600"/>
           </a:xfrm>
           <a:prstGeom prst="roundRect">
             <a:avLst/>
@@ -5175,7 +5177,7 @@
         </p:nvSpPr>
         <p:spPr>
           <a:xfrm>
-            <a:off x="914400" y="2032000"/>
+            <a:off x="965200" y="2032000"/>
             <a:ext cx="558800" cy="558800"/>
           </a:xfrm>
           <a:prstGeom prst="ellipse">
@@ -5247,8 +5249,8 @@
         </p:nvSpPr>
         <p:spPr>
           <a:xfrm>
-            <a:off x="1701800" y="1993900"/>
-            <a:ext cx="9550400" cy="338554"/>
+            <a:off x="1727200" y="1993900"/>
+            <a:ext cx="9499600" cy="338554"/>
           </a:xfrm>
           <a:prstGeom prst="rect">
             <a:avLst/>
@@ -5289,8 +5291,8 @@
         </p:nvSpPr>
         <p:spPr>
           <a:xfrm>
-            <a:off x="1701800" y="2298700"/>
-            <a:ext cx="9550400" cy="300082"/>
+            <a:off x="1727200" y="2298700"/>
+            <a:ext cx="9499600" cy="300082"/>
           </a:xfrm>
           <a:prstGeom prst="rect">
             <a:avLst/>
@@ -5305,7 +5307,7 @@
           <a:p>
             <a:pPr algn="l"/>
             <a:r>
-              <a:rPr lang="en-US" altLang="zh-TW" sz="1350" b="1" dirty="0">
+              <a:rPr lang="en-US" altLang="zh-TW" sz="1400" b="1" dirty="0">
                 <a:solidFill>
                   <a:srgbClr val="C8102E"/>
                 </a:solidFill>
@@ -5331,8 +5333,8 @@
         </p:nvSpPr>
         <p:spPr>
           <a:xfrm>
-            <a:off x="736600" y="2819400"/>
-            <a:ext cx="10718800" cy="863600"/>
+            <a:off x="762000" y="2819400"/>
+            <a:ext cx="10668000" cy="863600"/>
           </a:xfrm>
           <a:prstGeom prst="roundRect">
             <a:avLst/>
@@ -5387,7 +5389,7 @@
         </p:nvSpPr>
         <p:spPr>
           <a:xfrm>
-            <a:off x="914400" y="2971800"/>
+            <a:off x="965200" y="2971800"/>
             <a:ext cx="558800" cy="558800"/>
           </a:xfrm>
           <a:prstGeom prst="ellipse">
@@ -5459,8 +5461,8 @@
         </p:nvSpPr>
         <p:spPr>
           <a:xfrm>
-            <a:off x="1701800" y="2933700"/>
-            <a:ext cx="9550400" cy="338554"/>
+            <a:off x="1727200" y="2933700"/>
+            <a:ext cx="9499600" cy="338554"/>
           </a:xfrm>
           <a:prstGeom prst="rect">
             <a:avLst/>
@@ -5501,8 +5503,8 @@
         </p:nvSpPr>
         <p:spPr>
           <a:xfrm>
-            <a:off x="1701800" y="3238500"/>
-            <a:ext cx="9550400" cy="300082"/>
+            <a:off x="1727200" y="3238500"/>
+            <a:ext cx="9499600" cy="300082"/>
           </a:xfrm>
           <a:prstGeom prst="rect">
             <a:avLst/>
@@ -5517,7 +5519,7 @@
           <a:p>
             <a:pPr algn="l"/>
             <a:r>
-              <a:rPr lang="en-US" altLang="zh-TW" sz="1350" b="1" dirty="0">
+              <a:rPr lang="en-US" altLang="zh-TW" sz="1400" b="1" dirty="0">
                 <a:solidFill>
                   <a:srgbClr val="C8102E"/>
                 </a:solidFill>
@@ -5543,8 +5545,8 @@
         </p:nvSpPr>
         <p:spPr>
           <a:xfrm>
-            <a:off x="736600" y="3759200"/>
-            <a:ext cx="10718800" cy="863600"/>
+            <a:off x="762000" y="3759200"/>
+            <a:ext cx="10668000" cy="863600"/>
           </a:xfrm>
           <a:prstGeom prst="roundRect">
             <a:avLst/>
@@ -5599,7 +5601,7 @@
         </p:nvSpPr>
         <p:spPr>
           <a:xfrm>
-            <a:off x="914400" y="3911600"/>
+            <a:off x="965200" y="3911600"/>
             <a:ext cx="558800" cy="558800"/>
           </a:xfrm>
           <a:prstGeom prst="ellipse">
@@ -5671,8 +5673,8 @@
         </p:nvSpPr>
         <p:spPr>
           <a:xfrm>
-            <a:off x="1701800" y="3873500"/>
-            <a:ext cx="9550400" cy="338554"/>
+            <a:off x="1727200" y="3873500"/>
+            <a:ext cx="9499600" cy="338554"/>
           </a:xfrm>
           <a:prstGeom prst="rect">
             <a:avLst/>
@@ -5713,8 +5715,8 @@
         </p:nvSpPr>
         <p:spPr>
           <a:xfrm>
-            <a:off x="1701800" y="4178300"/>
-            <a:ext cx="9550400" cy="300082"/>
+            <a:off x="1727200" y="4178300"/>
+            <a:ext cx="9499600" cy="300082"/>
           </a:xfrm>
           <a:prstGeom prst="rect">
             <a:avLst/>
@@ -5729,7 +5731,7 @@
           <a:p>
             <a:pPr algn="l"/>
             <a:r>
-              <a:rPr lang="en-US" altLang="zh-TW" sz="1350" b="1" dirty="0">
+              <a:rPr lang="en-US" altLang="zh-TW" sz="1400" b="1" dirty="0">
                 <a:solidFill>
                   <a:srgbClr val="C8102E"/>
                 </a:solidFill>
@@ -5755,8 +5757,8 @@
         </p:nvSpPr>
         <p:spPr>
           <a:xfrm>
-            <a:off x="736600" y="4699000"/>
-            <a:ext cx="10718800" cy="863600"/>
+            <a:off x="762000" y="4699000"/>
+            <a:ext cx="10668000" cy="863600"/>
           </a:xfrm>
           <a:prstGeom prst="roundRect">
             <a:avLst/>
@@ -5811,7 +5813,7 @@
         </p:nvSpPr>
         <p:spPr>
           <a:xfrm>
-            <a:off x="914400" y="4851400"/>
+            <a:off x="965200" y="4851400"/>
             <a:ext cx="558800" cy="558800"/>
           </a:xfrm>
           <a:prstGeom prst="ellipse">
@@ -5883,8 +5885,8 @@
         </p:nvSpPr>
         <p:spPr>
           <a:xfrm>
-            <a:off x="1701800" y="4813300"/>
-            <a:ext cx="9550400" cy="338554"/>
+            <a:off x="1727200" y="4813300"/>
+            <a:ext cx="9499600" cy="338554"/>
           </a:xfrm>
           <a:prstGeom prst="rect">
             <a:avLst/>
@@ -5925,8 +5927,8 @@
         </p:nvSpPr>
         <p:spPr>
           <a:xfrm>
-            <a:off x="1701800" y="5118100"/>
-            <a:ext cx="9550400" cy="300082"/>
+            <a:off x="1727200" y="5118100"/>
+            <a:ext cx="9499600" cy="300082"/>
           </a:xfrm>
           <a:prstGeom prst="rect">
             <a:avLst/>
@@ -5941,7 +5943,7 @@
           <a:p>
             <a:pPr algn="l"/>
             <a:r>
-              <a:rPr lang="en-US" altLang="zh-TW" sz="1350" b="1" dirty="0">
+              <a:rPr lang="en-US" altLang="zh-TW" sz="1400" b="1" dirty="0">
                 <a:solidFill>
                   <a:srgbClr val="C8102E"/>
                 </a:solidFill>
@@ -5967,8 +5969,8 @@
         </p:nvSpPr>
         <p:spPr>
           <a:xfrm>
-            <a:off x="736600" y="5638800"/>
-            <a:ext cx="10718800" cy="863600"/>
+            <a:off x="762000" y="5638800"/>
+            <a:ext cx="10668000" cy="863600"/>
           </a:xfrm>
           <a:prstGeom prst="roundRect">
             <a:avLst/>
@@ -6023,7 +6025,7 @@
         </p:nvSpPr>
         <p:spPr>
           <a:xfrm>
-            <a:off x="914400" y="5791200"/>
+            <a:off x="965200" y="5791200"/>
             <a:ext cx="558800" cy="558800"/>
           </a:xfrm>
           <a:prstGeom prst="ellipse">
@@ -6088,8 +6090,8 @@
         </p:nvSpPr>
         <p:spPr>
           <a:xfrm>
-            <a:off x="1701800" y="5753100"/>
-            <a:ext cx="9550400" cy="338554"/>
+            <a:off x="1727200" y="5753100"/>
+            <a:ext cx="9499600" cy="338554"/>
           </a:xfrm>
           <a:prstGeom prst="rect">
             <a:avLst/>
@@ -6130,8 +6132,8 @@
         </p:nvSpPr>
         <p:spPr>
           <a:xfrm>
-            <a:off x="1701800" y="6057900"/>
-            <a:ext cx="9550400" cy="300082"/>
+            <a:off x="1727200" y="6057900"/>
+            <a:ext cx="9499600" cy="300082"/>
           </a:xfrm>
           <a:prstGeom prst="rect">
             <a:avLst/>
@@ -6146,7 +6148,7 @@
           <a:p>
             <a:pPr algn="l"/>
             <a:r>
-              <a:rPr lang="en-US" altLang="zh-TW" sz="1350">
+              <a:rPr lang="en-US" altLang="zh-TW" sz="1400">
                 <a:solidFill>
                   <a:srgbClr val="3A3A44"/>
                 </a:solidFill>
@@ -6159,7 +6161,7 @@
     </p:spTree>
     <p:extLst>
       <p:ext uri="{BB962C8B-B14F-4D97-AF65-F5344CB8AC3E}">
-        <p14:creationId xmlns:p14="http://schemas.microsoft.com/office/powerpoint/2010/main" val="3587613002"/>
+        <p14:creationId xmlns:p14="http://schemas.microsoft.com/office/powerpoint/2010/main" val="4050364387"/>
       </p:ext>
     </p:extLst>
   </p:cSld>
@@ -6237,8 +6239,8 @@
         </p:nvSpPr>
         <p:spPr>
           <a:xfrm>
-            <a:off x="647700" y="1905000"/>
-            <a:ext cx="3429000" cy="1031460"/>
+            <a:off x="762000" y="1905000"/>
+            <a:ext cx="3352800" cy="1028700"/>
           </a:xfrm>
           <a:prstGeom prst="roundRect">
             <a:avLst/>
@@ -6293,8 +6295,8 @@
         </p:nvSpPr>
         <p:spPr>
           <a:xfrm>
-            <a:off x="876300" y="2026920"/>
-            <a:ext cx="2971800" cy="338554"/>
+            <a:off x="990600" y="2026920"/>
+            <a:ext cx="2895600" cy="338554"/>
           </a:xfrm>
           <a:prstGeom prst="rect">
             <a:avLst/>
@@ -6343,8 +6345,8 @@
         </p:nvSpPr>
         <p:spPr>
           <a:xfrm>
-            <a:off x="876300" y="2311839"/>
-            <a:ext cx="2971800" cy="523220"/>
+            <a:off x="990600" y="2311400"/>
+            <a:ext cx="2895600" cy="523220"/>
           </a:xfrm>
           <a:prstGeom prst="rect">
             <a:avLst/>
@@ -6392,7 +6394,7 @@
         </p:nvSpPr>
         <p:spPr>
           <a:xfrm>
-            <a:off x="2686050" y="2339341"/>
+            <a:off x="2692400" y="2349500"/>
             <a:ext cx="1219200" cy="381000"/>
           </a:xfrm>
           <a:prstGeom prst="roundRect">
@@ -6435,6 +6437,8 @@
                 <a:solidFill>
                   <a:srgbClr val="196B24"/>
                 </a:solidFill>
+                <a:latin typeface="Calibri"/>
+                <a:cs typeface="Calibri"/>
               </a:rPr>
               <a:t>▲ +50 %</a:t>
             </a:r>
@@ -6455,8 +6459,8 @@
         </p:nvSpPr>
         <p:spPr>
           <a:xfrm>
-            <a:off x="4381500" y="1905000"/>
-            <a:ext cx="3429000" cy="1031460"/>
+            <a:off x="4419600" y="1905000"/>
+            <a:ext cx="3352800" cy="1028700"/>
           </a:xfrm>
           <a:prstGeom prst="roundRect">
             <a:avLst/>
@@ -6511,8 +6515,8 @@
         </p:nvSpPr>
         <p:spPr>
           <a:xfrm>
-            <a:off x="4610100" y="2026920"/>
-            <a:ext cx="2971800" cy="338554"/>
+            <a:off x="4648200" y="2026920"/>
+            <a:ext cx="2895600" cy="338554"/>
           </a:xfrm>
           <a:prstGeom prst="rect">
             <a:avLst/>
@@ -6561,8 +6565,8 @@
         </p:nvSpPr>
         <p:spPr>
           <a:xfrm>
-            <a:off x="4610100" y="2311839"/>
-            <a:ext cx="2971800" cy="523220"/>
+            <a:off x="4648200" y="2311400"/>
+            <a:ext cx="2895600" cy="523220"/>
           </a:xfrm>
           <a:prstGeom prst="rect">
             <a:avLst/>
@@ -6610,7 +6614,7 @@
         </p:nvSpPr>
         <p:spPr>
           <a:xfrm>
-            <a:off x="6400800" y="2344420"/>
+            <a:off x="6350000" y="2349500"/>
             <a:ext cx="1219200" cy="381000"/>
           </a:xfrm>
           <a:prstGeom prst="roundRect">
@@ -6653,6 +6657,8 @@
                 <a:solidFill>
                   <a:srgbClr val="196B24"/>
                 </a:solidFill>
+                <a:latin typeface="Calibri"/>
+                <a:cs typeface="Calibri"/>
               </a:rPr>
               <a:t>▲ +147 %</a:t>
             </a:r>
@@ -6673,8 +6679,8 @@
         </p:nvSpPr>
         <p:spPr>
           <a:xfrm>
-            <a:off x="8115300" y="1905000"/>
-            <a:ext cx="3429000" cy="1031460"/>
+            <a:off x="8077200" y="1905000"/>
+            <a:ext cx="3352800" cy="1028700"/>
           </a:xfrm>
           <a:prstGeom prst="roundRect">
             <a:avLst/>
@@ -6729,8 +6735,8 @@
         </p:nvSpPr>
         <p:spPr>
           <a:xfrm>
-            <a:off x="8343900" y="2026920"/>
-            <a:ext cx="2971800" cy="338554"/>
+            <a:off x="8305800" y="2026920"/>
+            <a:ext cx="2895600" cy="338554"/>
           </a:xfrm>
           <a:prstGeom prst="rect">
             <a:avLst/>
@@ -6779,8 +6785,8 @@
         </p:nvSpPr>
         <p:spPr>
           <a:xfrm>
-            <a:off x="8343900" y="2311839"/>
-            <a:ext cx="2971800" cy="523220"/>
+            <a:off x="8305800" y="2311400"/>
+            <a:ext cx="2895600" cy="523220"/>
           </a:xfrm>
           <a:prstGeom prst="rect">
             <a:avLst/>
@@ -6828,7 +6834,7 @@
         </p:nvSpPr>
         <p:spPr>
           <a:xfrm>
-            <a:off x="10134600" y="2396545"/>
+            <a:off x="10007600" y="2349500"/>
             <a:ext cx="1219200" cy="381000"/>
           </a:xfrm>
           <a:prstGeom prst="roundRect">
@@ -6871,6 +6877,9 @@
                 <a:solidFill>
                   <a:srgbClr val="196B24"/>
                 </a:solidFill>
+                <a:latin typeface="Calibri"/>
+                <a:ea typeface="Calibri"/>
+                <a:cs typeface="Calibri"/>
               </a:rPr>
               <a:t>▲ +0,4 pt</a:t>
             </a:r>
@@ -6878,6 +6887,8 @@
               <a:solidFill>
                 <a:srgbClr val="196B24"/>
               </a:solidFill>
+              <a:latin typeface="Calibri"/>
+              <a:cs typeface="Calibri"/>
             </a:endParaRPr>
           </a:p>
         </p:txBody>
@@ -6896,8 +6907,8 @@
         </p:nvSpPr>
         <p:spPr>
           <a:xfrm>
-            <a:off x="647700" y="3139439"/>
-            <a:ext cx="3429000" cy="1021919"/>
+            <a:off x="762000" y="3136900"/>
+            <a:ext cx="3352800" cy="1028700"/>
           </a:xfrm>
           <a:prstGeom prst="roundRect">
             <a:avLst/>
@@ -6952,8 +6963,8 @@
         </p:nvSpPr>
         <p:spPr>
           <a:xfrm>
-            <a:off x="876300" y="3261360"/>
-            <a:ext cx="2971800" cy="338554"/>
+            <a:off x="990600" y="3258820"/>
+            <a:ext cx="2895600" cy="338554"/>
           </a:xfrm>
           <a:prstGeom prst="rect">
             <a:avLst/>
@@ -7002,8 +7013,8 @@
         </p:nvSpPr>
         <p:spPr>
           <a:xfrm>
-            <a:off x="876300" y="3546278"/>
-            <a:ext cx="2971800" cy="523220"/>
+            <a:off x="990600" y="3543300"/>
+            <a:ext cx="2895600" cy="523220"/>
           </a:xfrm>
           <a:prstGeom prst="rect">
             <a:avLst/>
@@ -7051,7 +7062,7 @@
         </p:nvSpPr>
         <p:spPr>
           <a:xfrm>
-            <a:off x="2686050" y="3607020"/>
+            <a:off x="2692400" y="3581400"/>
             <a:ext cx="1219200" cy="381000"/>
           </a:xfrm>
           <a:prstGeom prst="roundRect">
@@ -7094,6 +7105,8 @@
                 <a:solidFill>
                   <a:srgbClr val="196B24"/>
                 </a:solidFill>
+                <a:latin typeface="Calibri"/>
+                <a:cs typeface="Calibri"/>
               </a:rPr>
               <a:t>▲ +67 %</a:t>
             </a:r>
@@ -7114,8 +7127,8 @@
         </p:nvSpPr>
         <p:spPr>
           <a:xfrm>
-            <a:off x="4381500" y="3139439"/>
-            <a:ext cx="3429000" cy="1021919"/>
+            <a:off x="4419600" y="3136900"/>
+            <a:ext cx="3352800" cy="1028700"/>
           </a:xfrm>
           <a:prstGeom prst="roundRect">
             <a:avLst/>
@@ -7170,8 +7183,8 @@
         </p:nvSpPr>
         <p:spPr>
           <a:xfrm>
-            <a:off x="4610100" y="3261360"/>
-            <a:ext cx="2971800" cy="338554"/>
+            <a:off x="4648200" y="3258820"/>
+            <a:ext cx="2895600" cy="338554"/>
           </a:xfrm>
           <a:prstGeom prst="rect">
             <a:avLst/>
@@ -7220,8 +7233,8 @@
         </p:nvSpPr>
         <p:spPr>
           <a:xfrm>
-            <a:off x="4610100" y="3546278"/>
-            <a:ext cx="2971800" cy="523220"/>
+            <a:off x="4648200" y="3543300"/>
+            <a:ext cx="2895600" cy="523220"/>
           </a:xfrm>
           <a:prstGeom prst="rect">
             <a:avLst/>
@@ -7269,7 +7282,7 @@
         </p:nvSpPr>
         <p:spPr>
           <a:xfrm>
-            <a:off x="6400800" y="3596639"/>
+            <a:off x="6350000" y="3581400"/>
             <a:ext cx="1219200" cy="381000"/>
           </a:xfrm>
           <a:prstGeom prst="roundRect">
@@ -7312,6 +7325,8 @@
                 <a:solidFill>
                   <a:srgbClr val="196B24"/>
                 </a:solidFill>
+                <a:latin typeface="Calibri"/>
+                <a:cs typeface="Calibri"/>
               </a:rPr>
               <a:t>▲ +75 %</a:t>
             </a:r>
@@ -7332,8 +7347,8 @@
         </p:nvSpPr>
         <p:spPr>
           <a:xfrm>
-            <a:off x="8115300" y="3139439"/>
-            <a:ext cx="3429000" cy="1021919"/>
+            <a:off x="8077200" y="3136900"/>
+            <a:ext cx="3352800" cy="1028700"/>
           </a:xfrm>
           <a:prstGeom prst="roundRect">
             <a:avLst/>
@@ -7388,8 +7403,8 @@
         </p:nvSpPr>
         <p:spPr>
           <a:xfrm>
-            <a:off x="8343900" y="3261360"/>
-            <a:ext cx="2971800" cy="338554"/>
+            <a:off x="8305800" y="3258820"/>
+            <a:ext cx="2895600" cy="338554"/>
           </a:xfrm>
           <a:prstGeom prst="rect">
             <a:avLst/>
@@ -7438,8 +7453,8 @@
         </p:nvSpPr>
         <p:spPr>
           <a:xfrm>
-            <a:off x="8343900" y="3546278"/>
-            <a:ext cx="2971800" cy="523220"/>
+            <a:off x="8305800" y="3543300"/>
+            <a:ext cx="2895600" cy="523220"/>
           </a:xfrm>
           <a:prstGeom prst="rect">
             <a:avLst/>
@@ -7487,7 +7502,7 @@
         </p:nvSpPr>
         <p:spPr>
           <a:xfrm>
-            <a:off x="10134600" y="3607020"/>
+            <a:off x="10007600" y="3581400"/>
             <a:ext cx="1219200" cy="381000"/>
           </a:xfrm>
           <a:prstGeom prst="roundRect">
@@ -7530,6 +7545,8 @@
                 <a:solidFill>
                   <a:srgbClr val="196B24"/>
                 </a:solidFill>
+                <a:latin typeface="Calibri"/>
+                <a:cs typeface="Calibri"/>
               </a:rPr>
               <a:t>▲ +46 %</a:t>
             </a:r>
@@ -7550,8 +7567,8 @@
         </p:nvSpPr>
         <p:spPr>
           <a:xfrm>
-            <a:off x="647700" y="6502400"/>
-            <a:ext cx="10896600" cy="304800"/>
+            <a:off x="762000" y="6324600"/>
+            <a:ext cx="10668000" cy="304800"/>
           </a:xfrm>
           <a:prstGeom prst="rect">
             <a:avLst/>
@@ -7595,8 +7612,8 @@
         </p:nvSpPr>
         <p:spPr>
           <a:xfrm>
-            <a:off x="647700" y="1905000"/>
-            <a:ext cx="3429000" cy="76200"/>
+            <a:off x="762000" y="1905000"/>
+            <a:ext cx="3352800" cy="76200"/>
           </a:xfrm>
           <a:prstGeom prst="rect">
             <a:avLst/>
@@ -7649,8 +7666,8 @@
         </p:nvSpPr>
         <p:spPr>
           <a:xfrm>
-            <a:off x="4381500" y="1905000"/>
-            <a:ext cx="3429000" cy="76200"/>
+            <a:off x="4419600" y="1905000"/>
+            <a:ext cx="3352800" cy="76200"/>
           </a:xfrm>
           <a:prstGeom prst="rect">
             <a:avLst/>
@@ -7703,8 +7720,8 @@
         </p:nvSpPr>
         <p:spPr>
           <a:xfrm>
-            <a:off x="8115300" y="1905000"/>
-            <a:ext cx="3429000" cy="76200"/>
+            <a:off x="8077200" y="1905000"/>
+            <a:ext cx="3352800" cy="76200"/>
           </a:xfrm>
           <a:prstGeom prst="rect">
             <a:avLst/>
@@ -7757,8 +7774,8 @@
         </p:nvSpPr>
         <p:spPr>
           <a:xfrm>
-            <a:off x="647700" y="3139439"/>
-            <a:ext cx="3429000" cy="76200"/>
+            <a:off x="762000" y="3136900"/>
+            <a:ext cx="3352800" cy="76200"/>
           </a:xfrm>
           <a:prstGeom prst="rect">
             <a:avLst/>
@@ -7811,8 +7828,8 @@
         </p:nvSpPr>
         <p:spPr>
           <a:xfrm>
-            <a:off x="4381500" y="3139439"/>
-            <a:ext cx="3429000" cy="76200"/>
+            <a:off x="4419600" y="3136900"/>
+            <a:ext cx="3352800" cy="76200"/>
           </a:xfrm>
           <a:prstGeom prst="rect">
             <a:avLst/>
@@ -7865,8 +7882,8 @@
         </p:nvSpPr>
         <p:spPr>
           <a:xfrm>
-            <a:off x="8115300" y="3139439"/>
-            <a:ext cx="3429000" cy="76200"/>
+            <a:off x="8077200" y="3136900"/>
+            <a:ext cx="3352800" cy="76200"/>
           </a:xfrm>
           <a:prstGeom prst="rect">
             <a:avLst/>
@@ -7909,11 +7926,17 @@
         <p:nvGraphicFramePr>
           <p:cNvPr id="201" name="Daily Trend Chart"/>
           <p:cNvGraphicFramePr/>
-          <p:nvPr/>
+          <p:nvPr>
+            <p:extLst>
+              <p:ext uri="{D42A27DB-BD31-4B8C-83A1-F6EECF244321}">
+                <p14:modId xmlns:p14="http://schemas.microsoft.com/office/powerpoint/2010/main" val="1771525519"/>
+              </p:ext>
+            </p:extLst>
+          </p:nvPr>
         </p:nvGraphicFramePr>
         <p:xfrm>
-          <a:off x="762000" y="4222100"/>
-          <a:ext cx="10668000" cy="2371740"/>
+          <a:off x="762000" y="4292600"/>
+          <a:ext cx="10668000" cy="2006600"/>
         </p:xfrm>
         <a:graphic>
           <a:graphicData uri="http://schemas.openxmlformats.org/drawingml/2006/chart">
@@ -8005,7 +8028,7 @@
         </p:blipFill>
         <p:spPr>
           <a:xfrm>
-            <a:off x="952390" y="1937026"/>
+            <a:off x="812800" y="1937026"/>
             <a:ext cx="2387600" cy="3175000"/>
           </a:xfrm>
           <a:prstGeom prst="rect">
@@ -8035,7 +8058,7 @@
         </p:blipFill>
         <p:spPr>
           <a:xfrm>
-            <a:off x="4807668" y="1937026"/>
+            <a:off x="4902200" y="1937026"/>
             <a:ext cx="2387600" cy="3175000"/>
           </a:xfrm>
           <a:prstGeom prst="rect">
@@ -8065,7 +8088,7 @@
         </p:blipFill>
         <p:spPr>
           <a:xfrm>
-            <a:off x="8973049" y="1937026"/>
+            <a:off x="8991600" y="1937026"/>
             <a:ext cx="2387600" cy="3175000"/>
           </a:xfrm>
           <a:prstGeom prst="rect">
@@ -8087,7 +8110,7 @@
         </p:nvSpPr>
         <p:spPr>
           <a:xfrm>
-            <a:off x="952390" y="5213626"/>
+            <a:off x="812800" y="5213626"/>
             <a:ext cx="2387600" cy="50800"/>
           </a:xfrm>
           <a:prstGeom prst="rect">
@@ -8141,7 +8164,7 @@
         </p:nvSpPr>
         <p:spPr>
           <a:xfrm>
-            <a:off x="952389" y="5315226"/>
+            <a:off x="721360" y="5315226"/>
             <a:ext cx="2999409" cy="338554"/>
           </a:xfrm>
           <a:prstGeom prst="rect">
@@ -8190,8 +8213,8 @@
         </p:nvSpPr>
         <p:spPr>
           <a:xfrm>
-            <a:off x="952390" y="5692874"/>
-            <a:ext cx="2387600" cy="738664"/>
+            <a:off x="721360" y="5693410"/>
+            <a:ext cx="2387600" cy="523220"/>
           </a:xfrm>
           <a:prstGeom prst="rect">
             <a:avLst/>
@@ -8230,7 +8253,7 @@
         </p:nvSpPr>
         <p:spPr>
           <a:xfrm>
-            <a:off x="4807668" y="5213626"/>
+            <a:off x="4902200" y="5213626"/>
             <a:ext cx="2387600" cy="50800"/>
           </a:xfrm>
           <a:prstGeom prst="rect">
@@ -8284,7 +8307,7 @@
         </p:nvSpPr>
         <p:spPr>
           <a:xfrm>
-            <a:off x="4807668" y="5315226"/>
+            <a:off x="4810760" y="5315226"/>
             <a:ext cx="2387600" cy="338554"/>
           </a:xfrm>
           <a:prstGeom prst="rect">
@@ -8333,7 +8356,7 @@
         </p:nvSpPr>
         <p:spPr>
           <a:xfrm>
-            <a:off x="4807668" y="5692874"/>
+            <a:off x="4810760" y="5693410"/>
             <a:ext cx="2387600" cy="738664"/>
           </a:xfrm>
           <a:prstGeom prst="rect">
@@ -8373,7 +8396,7 @@
         </p:nvSpPr>
         <p:spPr>
           <a:xfrm>
-            <a:off x="8973049" y="5213626"/>
+            <a:off x="8991600" y="5213626"/>
             <a:ext cx="2387600" cy="50800"/>
           </a:xfrm>
           <a:prstGeom prst="rect">
@@ -8427,7 +8450,7 @@
         </p:nvSpPr>
         <p:spPr>
           <a:xfrm>
-            <a:off x="8973049" y="5315226"/>
+            <a:off x="8900160" y="5315226"/>
             <a:ext cx="2794882" cy="338554"/>
           </a:xfrm>
           <a:prstGeom prst="rect">
@@ -8476,7 +8499,7 @@
         </p:nvSpPr>
         <p:spPr>
           <a:xfrm>
-            <a:off x="901590" y="1886226"/>
+            <a:off x="762000" y="1886226"/>
             <a:ext cx="2489200" cy="3276600"/>
           </a:xfrm>
           <a:prstGeom prst="rect">
@@ -8530,7 +8553,7 @@
         </p:nvSpPr>
         <p:spPr>
           <a:xfrm>
-            <a:off x="8973049" y="5673217"/>
+            <a:off x="8900160" y="5693410"/>
             <a:ext cx="2387600" cy="523220"/>
           </a:xfrm>
           <a:prstGeom prst="rect">
@@ -8570,7 +8593,7 @@
         </p:nvSpPr>
         <p:spPr>
           <a:xfrm>
-            <a:off x="4756868" y="1886226"/>
+            <a:off x="4851400" y="1886226"/>
             <a:ext cx="2489200" cy="3276600"/>
           </a:xfrm>
           <a:prstGeom prst="rect">
@@ -8624,7 +8647,7 @@
         </p:nvSpPr>
         <p:spPr>
           <a:xfrm>
-            <a:off x="8922249" y="1886226"/>
+            <a:off x="8940800" y="1886226"/>
             <a:ext cx="2489200" cy="3276600"/>
           </a:xfrm>
           <a:prstGeom prst="rect">
@@ -8667,7 +8690,7 @@
     </p:spTree>
     <p:extLst>
       <p:ext uri="{BB962C8B-B14F-4D97-AF65-F5344CB8AC3E}">
-        <p14:creationId xmlns:p14="http://schemas.microsoft.com/office/powerpoint/2010/main" val="3382681002"/>
+        <p14:creationId xmlns:p14="http://schemas.microsoft.com/office/powerpoint/2010/main" val="3602933214"/>
       </p:ext>
     </p:extLst>
   </p:cSld>
@@ -8740,8 +8763,8 @@
         </p:nvSpPr>
         <p:spPr>
           <a:xfrm>
-            <a:off x="838200" y="1905000"/>
-            <a:ext cx="5080000" cy="1905000"/>
+            <a:off x="762000" y="1905000"/>
+            <a:ext cx="5156200" cy="1905000"/>
           </a:xfrm>
           <a:prstGeom prst="roundRect">
             <a:avLst/>
@@ -8796,7 +8819,7 @@
         </p:nvSpPr>
         <p:spPr>
           <a:xfrm>
-            <a:off x="838200" y="2082800"/>
+            <a:off x="762000" y="2082800"/>
             <a:ext cx="76200" cy="1549400"/>
           </a:xfrm>
           <a:prstGeom prst="rect">
@@ -8850,8 +8873,8 @@
         </p:nvSpPr>
         <p:spPr>
           <a:xfrm>
-            <a:off x="4648200" y="2082800"/>
-            <a:ext cx="1066800" cy="304800"/>
+            <a:off x="4445000" y="2082800"/>
+            <a:ext cx="1270000" cy="304800"/>
           </a:xfrm>
           <a:prstGeom prst="roundRect">
             <a:avLst/>
@@ -8887,7 +8910,7 @@
           </a:bodyPr>
           <a:lstStyle/>
           <a:p>
-            <a:pPr algn="l"/>
+            <a:pPr algn="ctr"/>
             <a:r>
               <a:rPr lang="fr-FR" altLang="zh-TW" sz="1200" b="1">
                 <a:solidFill>
@@ -8918,8 +8941,8 @@
         </p:nvSpPr>
         <p:spPr>
           <a:xfrm>
-            <a:off x="1143000" y="2082800"/>
-            <a:ext cx="3429000" cy="646331"/>
+            <a:off x="1066800" y="2082800"/>
+            <a:ext cx="3327400" cy="646331"/>
           </a:xfrm>
           <a:prstGeom prst="rect">
             <a:avLst/>
@@ -8967,8 +8990,8 @@
         </p:nvSpPr>
         <p:spPr>
           <a:xfrm>
-            <a:off x="1143000" y="2844800"/>
-            <a:ext cx="4521200" cy="738664"/>
+            <a:off x="1066800" y="2844800"/>
+            <a:ext cx="4648200" cy="738664"/>
           </a:xfrm>
           <a:prstGeom prst="rect">
             <a:avLst/>
@@ -9013,7 +9036,7 @@
         <p:spPr>
           <a:xfrm>
             <a:off x="6273800" y="1905000"/>
-            <a:ext cx="5080000" cy="1905000"/>
+            <a:ext cx="5156200" cy="1905000"/>
           </a:xfrm>
           <a:prstGeom prst="roundRect">
             <a:avLst/>
@@ -9122,8 +9145,8 @@
         </p:nvSpPr>
         <p:spPr>
           <a:xfrm>
-            <a:off x="10083800" y="2082800"/>
-            <a:ext cx="1066800" cy="304800"/>
+            <a:off x="9956800" y="2082800"/>
+            <a:ext cx="1270000" cy="304800"/>
           </a:xfrm>
           <a:prstGeom prst="roundRect">
             <a:avLst/>
@@ -9159,7 +9182,7 @@
           </a:bodyPr>
           <a:lstStyle/>
           <a:p>
-            <a:pPr algn="l"/>
+            <a:pPr algn="ctr"/>
             <a:r>
               <a:rPr lang="fr-FR" altLang="zh-TW" sz="1200" b="1">
                 <a:solidFill>
@@ -9191,7 +9214,7 @@
         <p:spPr>
           <a:xfrm>
             <a:off x="6578600" y="2082800"/>
-            <a:ext cx="3429000" cy="646331"/>
+            <a:ext cx="3327400" cy="646331"/>
           </a:xfrm>
           <a:prstGeom prst="rect">
             <a:avLst/>
@@ -9240,7 +9263,7 @@
         <p:spPr>
           <a:xfrm>
             <a:off x="6578600" y="2844800"/>
-            <a:ext cx="4521200" cy="738664"/>
+            <a:ext cx="4648200" cy="738664"/>
           </a:xfrm>
           <a:prstGeom prst="rect">
             <a:avLst/>
@@ -9284,8 +9307,8 @@
         </p:nvSpPr>
         <p:spPr>
           <a:xfrm>
-            <a:off x="838200" y="4114800"/>
-            <a:ext cx="5080000" cy="1905000"/>
+            <a:off x="762000" y="4114800"/>
+            <a:ext cx="5156200" cy="1905000"/>
           </a:xfrm>
           <a:prstGeom prst="roundRect">
             <a:avLst/>
@@ -9340,7 +9363,7 @@
         </p:nvSpPr>
         <p:spPr>
           <a:xfrm>
-            <a:off x="838200" y="4292600"/>
+            <a:off x="762000" y="4292600"/>
             <a:ext cx="76200" cy="1549400"/>
           </a:xfrm>
           <a:prstGeom prst="rect">
@@ -9394,8 +9417,8 @@
         </p:nvSpPr>
         <p:spPr>
           <a:xfrm>
-            <a:off x="4648200" y="4292600"/>
-            <a:ext cx="1066800" cy="304800"/>
+            <a:off x="4445000" y="4292600"/>
+            <a:ext cx="1270000" cy="304800"/>
           </a:xfrm>
           <a:prstGeom prst="roundRect">
             <a:avLst/>
@@ -9431,7 +9454,7 @@
           </a:bodyPr>
           <a:lstStyle/>
           <a:p>
-            <a:pPr algn="l"/>
+            <a:pPr algn="ctr"/>
             <a:r>
               <a:rPr lang="fr-FR" altLang="zh-TW" sz="1200" b="1">
                 <a:solidFill>
@@ -9462,8 +9485,8 @@
         </p:nvSpPr>
         <p:spPr>
           <a:xfrm>
-            <a:off x="1143000" y="4292600"/>
-            <a:ext cx="3429000" cy="646331"/>
+            <a:off x="1066800" y="4292600"/>
+            <a:ext cx="3327400" cy="646331"/>
           </a:xfrm>
           <a:prstGeom prst="rect">
             <a:avLst/>
@@ -9511,8 +9534,8 @@
         </p:nvSpPr>
         <p:spPr>
           <a:xfrm>
-            <a:off x="1143000" y="5054600"/>
-            <a:ext cx="4521200" cy="523220"/>
+            <a:off x="1066800" y="5054600"/>
+            <a:ext cx="4648200" cy="523220"/>
           </a:xfrm>
           <a:prstGeom prst="rect">
             <a:avLst/>
@@ -9557,7 +9580,7 @@
         <p:spPr>
           <a:xfrm>
             <a:off x="6273800" y="4114800"/>
-            <a:ext cx="5080000" cy="1905000"/>
+            <a:ext cx="5156200" cy="1905000"/>
           </a:xfrm>
           <a:prstGeom prst="roundRect">
             <a:avLst/>
@@ -9666,8 +9689,8 @@
         </p:nvSpPr>
         <p:spPr>
           <a:xfrm>
-            <a:off x="10083800" y="4292600"/>
-            <a:ext cx="1066800" cy="304800"/>
+            <a:off x="9956800" y="4292600"/>
+            <a:ext cx="1270000" cy="304800"/>
           </a:xfrm>
           <a:prstGeom prst="roundRect">
             <a:avLst/>
@@ -9703,7 +9726,7 @@
           </a:bodyPr>
           <a:lstStyle/>
           <a:p>
-            <a:pPr algn="l"/>
+            <a:pPr algn="ctr"/>
             <a:r>
               <a:rPr lang="fr-FR" altLang="zh-TW" sz="1200" b="1">
                 <a:solidFill>
@@ -9735,7 +9758,7 @@
         <p:spPr>
           <a:xfrm>
             <a:off x="6578600" y="4292600"/>
-            <a:ext cx="3429000" cy="646331"/>
+            <a:ext cx="3327400" cy="646331"/>
           </a:xfrm>
           <a:prstGeom prst="rect">
             <a:avLst/>
@@ -9784,7 +9807,7 @@
         <p:spPr>
           <a:xfrm>
             <a:off x="6578600" y="5054600"/>
-            <a:ext cx="4521200" cy="738664"/>
+            <a:ext cx="4648200" cy="738664"/>
           </a:xfrm>
           <a:prstGeom prst="rect">
             <a:avLst/>
@@ -9817,7 +9840,7 @@
     </p:spTree>
     <p:extLst>
       <p:ext uri="{BB962C8B-B14F-4D97-AF65-F5344CB8AC3E}">
-        <p14:creationId xmlns:p14="http://schemas.microsoft.com/office/powerpoint/2010/main" val="2629022506"/>
+        <p14:creationId xmlns:p14="http://schemas.microsoft.com/office/powerpoint/2010/main" val="3853676808"/>
       </p:ext>
     </p:extLst>
   </p:cSld>
@@ -9890,8 +9913,8 @@
         </p:nvSpPr>
         <p:spPr>
           <a:xfrm>
-            <a:off x="736600" y="2032000"/>
-            <a:ext cx="10718800" cy="990600"/>
+            <a:off x="762000" y="2032000"/>
+            <a:ext cx="10668000" cy="990600"/>
           </a:xfrm>
           <a:prstGeom prst="roundRect">
             <a:avLst/>
@@ -9946,8 +9969,8 @@
         </p:nvSpPr>
         <p:spPr>
           <a:xfrm>
-            <a:off x="939800" y="2235200"/>
-            <a:ext cx="584200" cy="584200"/>
+            <a:off x="965200" y="2247900"/>
+            <a:ext cx="558800" cy="558800"/>
           </a:xfrm>
           <a:prstGeom prst="ellipse">
             <a:avLst/>
@@ -9985,7 +10008,7 @@
           <a:p>
             <a:pPr algn="ctr"/>
             <a:r>
-              <a:rPr lang="en-US" altLang="zh-TW" sz="2200" b="1" dirty="0">
+              <a:rPr lang="en-US" altLang="zh-TW" sz="2000" b="1" dirty="0">
                 <a:solidFill>
                   <a:srgbClr val="FFFFFF"/>
                 </a:solidFill>
@@ -9994,7 +10017,7 @@
               </a:rPr>
               <a:t>1</a:t>
             </a:r>
-            <a:endParaRPr lang="zh-TW" altLang="en-US" sz="2200" b="1" dirty="0">
+            <a:endParaRPr lang="zh-TW" altLang="en-US" sz="2000" b="1" dirty="0">
               <a:solidFill>
                 <a:srgbClr val="FFFFFF"/>
               </a:solidFill>
@@ -10018,8 +10041,8 @@
         </p:nvSpPr>
         <p:spPr>
           <a:xfrm>
-            <a:off x="1752600" y="2171700"/>
-            <a:ext cx="9474200" cy="346249"/>
+            <a:off x="1727200" y="2171700"/>
+            <a:ext cx="9499600" cy="346249"/>
           </a:xfrm>
           <a:prstGeom prst="rect">
             <a:avLst/>
@@ -10034,7 +10057,7 @@
           <a:p>
             <a:pPr algn="l"/>
             <a:r>
-              <a:rPr lang="fr-FR" altLang="zh-TW" sz="1650" b="1">
+              <a:rPr lang="fr-FR" altLang="zh-TW" sz="1600" b="1">
                 <a:solidFill>
                   <a:srgbClr val="1A1A2E"/>
                 </a:solidFill>
@@ -10043,7 +10066,7 @@
               </a:rPr>
               <a:t>Planifier les contenus selon le calendrier culturel</a:t>
             </a:r>
-            <a:endParaRPr lang="zh-TW" altLang="en-US" sz="1650" b="1">
+            <a:endParaRPr lang="zh-TW" altLang="en-US" sz="1600" b="1">
               <a:solidFill>
                 <a:srgbClr val="1A1A2E"/>
               </a:solidFill>
@@ -10067,8 +10090,8 @@
         </p:nvSpPr>
         <p:spPr>
           <a:xfrm>
-            <a:off x="1752600" y="2501900"/>
-            <a:ext cx="9474200" cy="300082"/>
+            <a:off x="1727200" y="2501900"/>
+            <a:ext cx="9499600" cy="300082"/>
           </a:xfrm>
           <a:prstGeom prst="rect">
             <a:avLst/>
@@ -10083,7 +10106,7 @@
           <a:p>
             <a:pPr algn="l"/>
             <a:r>
-              <a:rPr lang="en-US" altLang="zh-TW" sz="1350">
+              <a:rPr lang="en-US" altLang="zh-TW" sz="1400">
                 <a:solidFill>
                   <a:srgbClr val="3A3A44"/>
                 </a:solidFill>
@@ -10107,8 +10130,8 @@
         </p:nvSpPr>
         <p:spPr>
           <a:xfrm>
-            <a:off x="736600" y="3149600"/>
-            <a:ext cx="10718800" cy="990600"/>
+            <a:off x="762000" y="3149600"/>
+            <a:ext cx="10668000" cy="990600"/>
           </a:xfrm>
           <a:prstGeom prst="roundRect">
             <a:avLst/>
@@ -10163,8 +10186,8 @@
         </p:nvSpPr>
         <p:spPr>
           <a:xfrm>
-            <a:off x="939800" y="3352800"/>
-            <a:ext cx="584200" cy="584200"/>
+            <a:off x="965200" y="3365500"/>
+            <a:ext cx="558800" cy="558800"/>
           </a:xfrm>
           <a:prstGeom prst="ellipse">
             <a:avLst/>
@@ -10202,7 +10225,7 @@
           <a:p>
             <a:pPr algn="ctr"/>
             <a:r>
-              <a:rPr lang="en-US" altLang="zh-TW" sz="2200" b="1">
+              <a:rPr lang="en-US" altLang="zh-TW" sz="2000" b="1">
                 <a:solidFill>
                   <a:srgbClr val="FFFFFF"/>
                 </a:solidFill>
@@ -10211,7 +10234,7 @@
               </a:rPr>
               <a:t>2</a:t>
             </a:r>
-            <a:endParaRPr lang="zh-TW" altLang="en-US" sz="2200" b="1">
+            <a:endParaRPr lang="zh-TW" altLang="en-US" sz="2000" b="1">
               <a:solidFill>
                 <a:srgbClr val="FFFFFF"/>
               </a:solidFill>
@@ -10235,8 +10258,8 @@
         </p:nvSpPr>
         <p:spPr>
           <a:xfrm>
-            <a:off x="1752600" y="3289300"/>
-            <a:ext cx="9474200" cy="346249"/>
+            <a:off x="1727200" y="3289300"/>
+            <a:ext cx="9499600" cy="346249"/>
           </a:xfrm>
           <a:prstGeom prst="rect">
             <a:avLst/>
@@ -10251,7 +10274,7 @@
           <a:p>
             <a:pPr algn="l"/>
             <a:r>
-              <a:rPr lang="fr-FR" altLang="zh-TW" sz="1650" b="1">
+              <a:rPr lang="fr-FR" altLang="zh-TW" sz="1600" b="1">
                 <a:solidFill>
                   <a:srgbClr val="1A1A2E"/>
                 </a:solidFill>
@@ -10260,7 +10283,7 @@
               </a:rPr>
               <a:t>Miser sur les formats « à enregistrer »</a:t>
             </a:r>
-            <a:endParaRPr lang="zh-TW" altLang="en-US" sz="1650" b="1">
+            <a:endParaRPr lang="zh-TW" altLang="en-US" sz="1600" b="1">
               <a:solidFill>
                 <a:srgbClr val="1A1A2E"/>
               </a:solidFill>
@@ -10284,8 +10307,8 @@
         </p:nvSpPr>
         <p:spPr>
           <a:xfrm>
-            <a:off x="1752600" y="3619500"/>
-            <a:ext cx="9474200" cy="300082"/>
+            <a:off x="1727200" y="3619500"/>
+            <a:ext cx="9499600" cy="300082"/>
           </a:xfrm>
           <a:prstGeom prst="rect">
             <a:avLst/>
@@ -10300,7 +10323,7 @@
           <a:p>
             <a:pPr algn="l"/>
             <a:r>
-              <a:rPr lang="en-US" altLang="zh-TW" sz="1350">
+              <a:rPr lang="en-US" altLang="zh-TW" sz="1400">
                 <a:solidFill>
                   <a:srgbClr val="3A3A44"/>
                 </a:solidFill>
@@ -10324,8 +10347,8 @@
         </p:nvSpPr>
         <p:spPr>
           <a:xfrm>
-            <a:off x="736600" y="4267200"/>
-            <a:ext cx="10718800" cy="990600"/>
+            <a:off x="762000" y="4267200"/>
+            <a:ext cx="10668000" cy="990600"/>
           </a:xfrm>
           <a:prstGeom prst="roundRect">
             <a:avLst/>
@@ -10380,8 +10403,8 @@
         </p:nvSpPr>
         <p:spPr>
           <a:xfrm>
-            <a:off x="939800" y="4470400"/>
-            <a:ext cx="584200" cy="584200"/>
+            <a:off x="965200" y="4483100"/>
+            <a:ext cx="558800" cy="558800"/>
           </a:xfrm>
           <a:prstGeom prst="ellipse">
             <a:avLst/>
@@ -10419,7 +10442,7 @@
           <a:p>
             <a:pPr algn="ctr"/>
             <a:r>
-              <a:rPr lang="en-US" altLang="zh-TW" sz="2200" b="1">
+              <a:rPr lang="en-US" altLang="zh-TW" sz="2000" b="1">
                 <a:solidFill>
                   <a:srgbClr val="FFFFFF"/>
                 </a:solidFill>
@@ -10428,7 +10451,7 @@
               </a:rPr>
               <a:t>3</a:t>
             </a:r>
-            <a:endParaRPr lang="zh-TW" altLang="en-US" sz="2200" b="1">
+            <a:endParaRPr lang="zh-TW" altLang="en-US" sz="2000" b="1">
               <a:solidFill>
                 <a:srgbClr val="FFFFFF"/>
               </a:solidFill>
@@ -10452,8 +10475,8 @@
         </p:nvSpPr>
         <p:spPr>
           <a:xfrm>
-            <a:off x="1752600" y="4406900"/>
-            <a:ext cx="9474200" cy="346249"/>
+            <a:off x="1727200" y="4406900"/>
+            <a:ext cx="9499600" cy="346249"/>
           </a:xfrm>
           <a:prstGeom prst="rect">
             <a:avLst/>
@@ -10468,7 +10491,7 @@
           <a:p>
             <a:pPr algn="l"/>
             <a:r>
-              <a:rPr lang="fr-FR" altLang="zh-TW" sz="1650" b="1">
+              <a:rPr lang="fr-FR" altLang="zh-TW" sz="1600" b="1">
                 <a:solidFill>
                   <a:srgbClr val="1A1A2E"/>
                 </a:solidFill>
@@ -10477,7 +10500,7 @@
               </a:rPr>
               <a:t>Convertir le pic d'abonnés</a:t>
             </a:r>
-            <a:endParaRPr lang="zh-TW" altLang="en-US" sz="1650" b="1">
+            <a:endParaRPr lang="zh-TW" altLang="en-US" sz="1600" b="1">
               <a:solidFill>
                 <a:srgbClr val="1A1A2E"/>
               </a:solidFill>
@@ -10501,8 +10524,8 @@
         </p:nvSpPr>
         <p:spPr>
           <a:xfrm>
-            <a:off x="1752600" y="4737100"/>
-            <a:ext cx="9474200" cy="300082"/>
+            <a:off x="1727200" y="4737100"/>
+            <a:ext cx="9499600" cy="300082"/>
           </a:xfrm>
           <a:prstGeom prst="rect">
             <a:avLst/>
@@ -10517,7 +10540,7 @@
           <a:p>
             <a:pPr algn="l"/>
             <a:r>
-              <a:rPr lang="en-US" altLang="zh-TW" sz="1350">
+              <a:rPr lang="en-US" altLang="zh-TW" sz="1400">
                 <a:solidFill>
                   <a:srgbClr val="3A3A44"/>
                 </a:solidFill>
@@ -10541,8 +10564,8 @@
         </p:nvSpPr>
         <p:spPr>
           <a:xfrm>
-            <a:off x="736600" y="5384800"/>
-            <a:ext cx="10718800" cy="990600"/>
+            <a:off x="762000" y="5384800"/>
+            <a:ext cx="10668000" cy="990600"/>
           </a:xfrm>
           <a:prstGeom prst="roundRect">
             <a:avLst/>
@@ -10597,8 +10620,8 @@
         </p:nvSpPr>
         <p:spPr>
           <a:xfrm>
-            <a:off x="939800" y="5588000"/>
-            <a:ext cx="584200" cy="584200"/>
+            <a:off x="965200" y="5600700"/>
+            <a:ext cx="558800" cy="558800"/>
           </a:xfrm>
           <a:prstGeom prst="ellipse">
             <a:avLst/>
@@ -10636,7 +10659,7 @@
           <a:p>
             <a:pPr algn="ctr"/>
             <a:r>
-              <a:rPr lang="en-US" altLang="zh-TW" sz="2200" b="1">
+              <a:rPr lang="en-US" altLang="zh-TW" sz="2000" b="1">
                 <a:solidFill>
                   <a:srgbClr val="FFFFFF"/>
                 </a:solidFill>
@@ -10645,7 +10668,7 @@
               </a:rPr>
               <a:t>4</a:t>
             </a:r>
-            <a:endParaRPr lang="zh-TW" altLang="en-US" sz="2200" b="1">
+            <a:endParaRPr lang="zh-TW" altLang="en-US" sz="2000" b="1">
               <a:solidFill>
                 <a:srgbClr val="FFFFFF"/>
               </a:solidFill>
@@ -10669,8 +10692,8 @@
         </p:nvSpPr>
         <p:spPr>
           <a:xfrm>
-            <a:off x="1752600" y="5524500"/>
-            <a:ext cx="9474200" cy="346249"/>
+            <a:off x="1727200" y="5524500"/>
+            <a:ext cx="9499600" cy="346249"/>
           </a:xfrm>
           <a:prstGeom prst="rect">
             <a:avLst/>
@@ -10685,7 +10708,7 @@
           <a:p>
             <a:pPr algn="l"/>
             <a:r>
-              <a:rPr lang="en-US" altLang="zh-TW" sz="1650" b="1">
+              <a:rPr lang="en-US" altLang="zh-TW" sz="1600" b="1">
                 <a:solidFill>
                   <a:srgbClr val="1A1A2E"/>
                 </a:solidFill>
@@ -10694,7 +10717,7 @@
               </a:rPr>
               <a:t>Répondre à chaque commentaire sous 24 h</a:t>
             </a:r>
-            <a:endParaRPr lang="zh-TW" altLang="en-US" sz="1650" b="1">
+            <a:endParaRPr lang="zh-TW" altLang="en-US" sz="1600" b="1">
               <a:solidFill>
                 <a:srgbClr val="1A1A2E"/>
               </a:solidFill>
@@ -10718,8 +10741,8 @@
         </p:nvSpPr>
         <p:spPr>
           <a:xfrm>
-            <a:off x="1752600" y="5854700"/>
-            <a:ext cx="9474200" cy="300082"/>
+            <a:off x="1727200" y="5854700"/>
+            <a:ext cx="9499600" cy="300082"/>
           </a:xfrm>
           <a:prstGeom prst="rect">
             <a:avLst/>
@@ -10734,7 +10757,7 @@
           <a:p>
             <a:pPr algn="l"/>
             <a:r>
-              <a:rPr lang="en-US" altLang="zh-TW" sz="1350">
+              <a:rPr lang="en-US" altLang="zh-TW" sz="1400">
                 <a:solidFill>
                   <a:srgbClr val="3A3A44"/>
                 </a:solidFill>
@@ -10821,7 +10844,7 @@
           <p:nvPr>
             <p:extLst>
               <p:ext uri="{D42A27DB-BD31-4B8C-83A1-F6EECF244321}">
-                <p14:modId xmlns:p14="http://schemas.microsoft.com/office/powerpoint/2010/main" val="1606896553"/>
+                <p14:modId xmlns:p14="http://schemas.microsoft.com/office/powerpoint/2010/main" val="1795744817"/>
               </p:ext>
             </p:extLst>
           </p:nvPr>
@@ -11524,14 +11547,14 @@
           <a:p>
             <a:pPr algn="l"/>
             <a:r>
-              <a:rPr lang="en-US" altLang="zh-TW" sz="1300" i="1">
+              <a:rPr lang="en-US" altLang="zh-TW" sz="1400" i="1">
                 <a:solidFill>
                   <a:srgbClr val="6B7280"/>
                 </a:solidFill>
               </a:rPr>
               <a:t>Un responsable par action · Bilan des résultats à la prochaine réunion hebdomadaire</a:t>
             </a:r>
-            <a:endParaRPr lang="zh-TW" altLang="en-US" sz="1300" i="1">
+            <a:endParaRPr lang="zh-TW" altLang="en-US" sz="1400" i="1">
               <a:solidFill>
                 <a:srgbClr val="6B7280"/>
               </a:solidFill>
@@ -11542,7 +11565,7 @@
     </p:spTree>
     <p:extLst>
       <p:ext uri="{BB962C8B-B14F-4D97-AF65-F5344CB8AC3E}">
-        <p14:creationId xmlns:p14="http://schemas.microsoft.com/office/powerpoint/2010/main" val="745401944"/>
+        <p14:creationId xmlns:p14="http://schemas.microsoft.com/office/powerpoint/2010/main" val="698127295"/>
       </p:ext>
     </p:extLst>
   </p:cSld>
